--- a/poc/refresh/0827_slide_codex_v5.pptx
+++ b/poc/refresh/0827_slide_codex_v5.pptx
@@ -446,23 +446,7 @@
               <a:buFontTx/>
               <a:buChar char="-"/>
             </a:pPr>
-            <a:r>
-              <a:t>說明各階段驗收目標 &amp; 非 DBA 外協作單位的 Requement</a:t>
-            </a:r>
-          </a:p>
-          <a:p>
-            <a:pPr marL="171450" indent="-171450">
-              <a:buFontTx/>
-              <a:buChar char="-"/>
-            </a:pPr>
-            <a:endParaRPr/>
-          </a:p>
-          <a:p>
-            <a:pPr marL="171450" indent="-171450">
-              <a:buFontTx/>
-              <a:buChar char="-"/>
-            </a:pPr>
-            <a:endParaRPr/>
+            <a:endParaRPr dirty="0"/>
           </a:p>
         </p:txBody>
       </p:sp>
@@ -1856,23 +1840,7 @@
               <a:buFontTx/>
               <a:buChar char="-"/>
             </a:pPr>
-            <a:r>
-              <a:t>說明各階段驗收目標 &amp; 非 DBA 外協作單位的 Requement</a:t>
-            </a:r>
-          </a:p>
-          <a:p>
-            <a:pPr marL="171450" indent="-171450">
-              <a:buFontTx/>
-              <a:buChar char="-"/>
-            </a:pPr>
-            <a:endParaRPr/>
-          </a:p>
-          <a:p>
-            <a:pPr marL="171450" indent="-171450">
-              <a:buFontTx/>
-              <a:buChar char="-"/>
-            </a:pPr>
-            <a:endParaRPr/>
+            <a:endParaRPr dirty="0"/>
           </a:p>
         </p:txBody>
       </p:sp>
@@ -2573,7 +2541,7 @@
 </file>
 
 <file path=ppt/slides/slide10.xml><?xml version="1.0" encoding="utf-8"?>
-<p:sld xmlns:a="http://schemas.openxmlformats.org/drawingml/2006/main" xmlns:p="http://schemas.openxmlformats.org/presentationml/2006/main" xmlns:r="http://schemas.openxmlformats.org/officeDocument/2006/relationships">
+<p:sld xmlns:a="http://schemas.openxmlformats.org/drawingml/2006/main" xmlns:r="http://schemas.openxmlformats.org/officeDocument/2006/relationships" xmlns:p="http://schemas.openxmlformats.org/presentationml/2006/main">
   <p:cSld>
     <p:spTree>
       <p:nvGrpSpPr>
@@ -2624,14 +2592,14 @@
           </a:ln>
         </p:spPr>
         <p:txBody>
-          <a:bodyPr anchor="t" bIns="0" lIns="0" rIns="0" tIns="0" wrap="square">
+          <a:bodyPr wrap="square" lIns="0" tIns="0" rIns="0" bIns="0" anchor="t">
             <a:normAutofit/>
           </a:bodyPr>
           <a:lstStyle/>
           <a:p>
             <a:pPr algn="l">
               <a:buNone/>
-              <a:defRPr b="1" sz="975">
+              <a:defRPr sz="975" b="1">
                 <a:solidFill>
                   <a:srgbClr val="2563EB"/>
                 </a:solidFill>
@@ -2641,7 +2609,7 @@
               </a:defRPr>
             </a:pPr>
             <a:r>
-              <a:rPr b="1" sz="975">
+              <a:rPr sz="975" b="1">
                 <a:solidFill>
                   <a:srgbClr val="2563EB"/>
                 </a:solidFill>
@@ -2683,13 +2651,13 @@
           </a:ln>
         </p:spPr>
         <p:txBody>
-          <a:bodyPr anchor="ctr" bIns="0" lIns="0" rIns="0" tIns="0" wrap="square">
+          <a:bodyPr wrap="square" lIns="0" tIns="0" rIns="0" bIns="0" anchor="ctr">
             <a:normAutofit/>
           </a:bodyPr>
           <a:lstStyle/>
           <a:p>
             <a:pPr>
-              <a:defRPr b="1" sz="3000">
+              <a:defRPr sz="3000" b="1">
                 <a:solidFill>
                   <a:srgbClr val="111827"/>
                 </a:solidFill>
@@ -2699,7 +2667,7 @@
               </a:defRPr>
             </a:pPr>
             <a:r>
-              <a:rPr altLang="en-US" b="1" dirty="0" lang="zh-TW" sz="3000">
+              <a:rPr lang="zh-TW" altLang="en-US" sz="3000" b="1" dirty="0">
                 <a:solidFill>
                   <a:srgbClr val="111827"/>
                 </a:solidFill>
@@ -2709,7 +2677,7 @@
               </a:rPr>
               <a:t>產品期待</a:t>
             </a:r>
-            <a:endParaRPr altLang="zh-TW" b="1" dirty="0" lang="en-US" sz="3000">
+            <a:endParaRPr lang="en-US" altLang="zh-TW" sz="3000" b="1" dirty="0">
               <a:solidFill>
                 <a:srgbClr val="111827"/>
               </a:solidFill>
@@ -2777,14 +2745,14 @@
           </a:ln>
         </p:spPr>
         <p:txBody>
-          <a:bodyPr anchor="t" bIns="0" lIns="0" rIns="0" tIns="0" wrap="square">
+          <a:bodyPr wrap="square" lIns="0" tIns="0" rIns="0" bIns="0" anchor="t">
             <a:normAutofit/>
           </a:bodyPr>
           <a:lstStyle/>
           <a:p>
             <a:pPr algn="r">
               <a:buNone/>
-              <a:defRPr b="0" sz="900">
+              <a:defRPr sz="900" b="0">
                 <a:solidFill>
                   <a:srgbClr val="667085"/>
                 </a:solidFill>
@@ -2794,7 +2762,7 @@
               </a:defRPr>
             </a:pPr>
             <a:r>
-              <a:rPr b="0" sz="900">
+              <a:rPr sz="900" b="0">
                 <a:solidFill>
                   <a:srgbClr val="667085"/>
                 </a:solidFill>
@@ -2836,14 +2804,14 @@
           </a:ln>
         </p:spPr>
         <p:txBody>
-          <a:bodyPr anchor="t" bIns="0" lIns="0" rIns="0" tIns="0" wrap="square">
+          <a:bodyPr wrap="square" lIns="0" tIns="0" rIns="0" bIns="0" anchor="t">
             <a:normAutofit/>
           </a:bodyPr>
           <a:lstStyle/>
           <a:p>
             <a:pPr algn="l">
               <a:buNone/>
-              <a:defRPr b="0" sz="750">
+              <a:defRPr sz="750" b="0">
                 <a:solidFill>
                   <a:srgbClr val="667085"/>
                 </a:solidFill>
@@ -2853,7 +2821,7 @@
               </a:defRPr>
             </a:pPr>
             <a:r>
-              <a:rPr b="0" sz="750">
+              <a:rPr sz="750" b="0">
                 <a:solidFill>
                   <a:srgbClr val="667085"/>
                 </a:solidFill>
@@ -2866,7 +2834,7 @@
           </a:p>
         </p:txBody>
       </p:sp>
-      <p:sp xmlns:a="http://schemas.openxmlformats.org/drawingml/2006/main" xmlns:p="http://schemas.openxmlformats.org/presentationml/2006/main">
+      <p:sp>
         <p:nvSpPr>
           <p:cNvPr id="60" name="Product expectations intro"/>
           <p:cNvSpPr txBox="1"/>
@@ -2886,14 +2854,14 @@
           </a:ln>
         </p:spPr>
         <p:txBody>
-          <a:bodyPr anchor="ctr" bIns="0" lIns="0" rIns="0" tIns="0" wrap="square">
+          <a:bodyPr wrap="square" lIns="0" tIns="0" rIns="0" bIns="0" anchor="ctr">
             <a:normAutofit/>
           </a:bodyPr>
           <a:lstStyle/>
           <a:p>
             <a:pPr algn="l"/>
             <a:r>
-              <a:rPr b="0" lang="zh-TW" sz="1800">
+              <a:rPr lang="zh-TW" sz="1800" b="0">
                 <a:solidFill>
                   <a:srgbClr val="344054"/>
                 </a:solidFill>
@@ -2906,7 +2874,7 @@
           </a:p>
         </p:txBody>
       </p:sp>
-      <p:sp xmlns:a="http://schemas.openxmlformats.org/drawingml/2006/main" xmlns:p="http://schemas.openxmlformats.org/presentationml/2006/main">
+      <p:sp>
         <p:nvSpPr>
           <p:cNvPr id="61" name="Database Self-Service panel"/>
           <p:cNvSpPr/>
@@ -2929,8 +2897,15 @@
             </a:solidFill>
           </a:ln>
         </p:spPr>
-      </p:sp>
-      <p:sp xmlns:a="http://schemas.openxmlformats.org/drawingml/2006/main" xmlns:p="http://schemas.openxmlformats.org/presentationml/2006/main">
+        <p:txBody>
+          <a:bodyPr/>
+          <a:lstStyle/>
+          <a:p>
+            <a:endParaRPr lang="zh-TW" altLang="en-US"/>
+          </a:p>
+        </p:txBody>
+      </p:sp>
+      <p:sp>
         <p:nvSpPr>
           <p:cNvPr id="62" name="Database Self-Service title"/>
           <p:cNvSpPr txBox="1"/>
@@ -2950,14 +2925,14 @@
           </a:ln>
         </p:spPr>
         <p:txBody>
-          <a:bodyPr anchor="ctr" bIns="0" lIns="0" rIns="0" tIns="0" wrap="square">
+          <a:bodyPr wrap="square" lIns="0" tIns="0" rIns="0" bIns="0" anchor="ctr">
             <a:normAutofit/>
           </a:bodyPr>
           <a:lstStyle/>
           <a:p>
             <a:pPr algn="l"/>
             <a:r>
-              <a:rPr b="1" lang="zh-TW" sz="1950">
+              <a:rPr lang="zh-TW" sz="1950" b="1">
                 <a:solidFill>
                   <a:srgbClr val="2563EB"/>
                 </a:solidFill>
@@ -2970,7 +2945,7 @@
           </a:p>
         </p:txBody>
       </p:sp>
-      <p:sp xmlns:a="http://schemas.openxmlformats.org/drawingml/2006/main" xmlns:p="http://schemas.openxmlformats.org/presentationml/2006/main">
+      <p:sp>
         <p:nvSpPr>
           <p:cNvPr id="63" name="Database Self-Service body"/>
           <p:cNvSpPr txBox="1"/>
@@ -2990,14 +2965,14 @@
           </a:ln>
         </p:spPr>
         <p:txBody>
-          <a:bodyPr anchor="t" bIns="0" lIns="0" rIns="0" tIns="76200" wrap="square">
+          <a:bodyPr wrap="square" lIns="0" tIns="76200" rIns="0" bIns="0" anchor="t">
             <a:normAutofit/>
           </a:bodyPr>
           <a:lstStyle/>
           <a:p>
             <a:pPr algn="l"/>
             <a:r>
-              <a:rPr b="0" lang="zh-TW" sz="1475">
+              <a:rPr lang="zh-TW" sz="1475" b="0">
                 <a:solidFill>
                   <a:srgbClr val="101828"/>
                 </a:solidFill>
@@ -3011,7 +2986,7 @@
           <a:p>
             <a:pPr algn="l"/>
             <a:r>
-              <a:rPr b="0" lang="zh-TW" sz="1475">
+              <a:rPr lang="zh-TW" sz="1475" b="0">
                 <a:solidFill>
                   <a:srgbClr val="101828"/>
                 </a:solidFill>
@@ -3024,7 +2999,7 @@
           </a:p>
         </p:txBody>
       </p:sp>
-      <p:sp xmlns:a="http://schemas.openxmlformats.org/drawingml/2006/main" xmlns:p="http://schemas.openxmlformats.org/presentationml/2006/main">
+      <p:sp>
         <p:nvSpPr>
           <p:cNvPr id="64" name="EDC 資源活化 panel"/>
           <p:cNvSpPr/>
@@ -3047,8 +3022,15 @@
             </a:solidFill>
           </a:ln>
         </p:spPr>
-      </p:sp>
-      <p:sp xmlns:a="http://schemas.openxmlformats.org/drawingml/2006/main" xmlns:p="http://schemas.openxmlformats.org/presentationml/2006/main">
+        <p:txBody>
+          <a:bodyPr/>
+          <a:lstStyle/>
+          <a:p>
+            <a:endParaRPr lang="zh-TW" altLang="en-US"/>
+          </a:p>
+        </p:txBody>
+      </p:sp>
+      <p:sp>
         <p:nvSpPr>
           <p:cNvPr id="65" name="EDC 資源活化 title"/>
           <p:cNvSpPr txBox="1"/>
@@ -3068,14 +3050,14 @@
           </a:ln>
         </p:spPr>
         <p:txBody>
-          <a:bodyPr anchor="ctr" bIns="0" lIns="0" rIns="0" tIns="0" wrap="square">
+          <a:bodyPr wrap="square" lIns="0" tIns="0" rIns="0" bIns="0" anchor="ctr">
             <a:normAutofit/>
           </a:bodyPr>
           <a:lstStyle/>
           <a:p>
             <a:pPr algn="l"/>
             <a:r>
-              <a:rPr b="1" lang="zh-TW" sz="1950">
+              <a:rPr lang="zh-TW" sz="1950" b="1">
                 <a:solidFill>
                   <a:srgbClr val="16803C"/>
                 </a:solidFill>
@@ -3088,7 +3070,7 @@
           </a:p>
         </p:txBody>
       </p:sp>
-      <p:sp xmlns:a="http://schemas.openxmlformats.org/drawingml/2006/main" xmlns:p="http://schemas.openxmlformats.org/presentationml/2006/main">
+      <p:sp>
         <p:nvSpPr>
           <p:cNvPr id="66" name="EDC 資源活化 body"/>
           <p:cNvSpPr txBox="1"/>
@@ -3108,14 +3090,14 @@
           </a:ln>
         </p:spPr>
         <p:txBody>
-          <a:bodyPr anchor="t" bIns="0" lIns="0" rIns="0" tIns="76200" wrap="square">
+          <a:bodyPr wrap="square" lIns="0" tIns="76200" rIns="0" bIns="0" anchor="t">
             <a:normAutofit/>
           </a:bodyPr>
           <a:lstStyle/>
           <a:p>
             <a:pPr algn="l"/>
             <a:r>
-              <a:rPr b="0" lang="zh-TW" sz="1475">
+              <a:rPr lang="zh-TW" sz="1475" b="0">
                 <a:solidFill>
                   <a:srgbClr val="101828"/>
                 </a:solidFill>
@@ -3129,7 +3111,7 @@
           <a:p>
             <a:pPr algn="l"/>
             <a:r>
-              <a:rPr b="0" lang="zh-TW" sz="1475">
+              <a:rPr lang="zh-TW" sz="1475" b="0">
                 <a:solidFill>
                   <a:srgbClr val="101828"/>
                 </a:solidFill>
@@ -3142,7 +3124,7 @@
           </a:p>
         </p:txBody>
       </p:sp>
-      <p:sp xmlns:a="http://schemas.openxmlformats.org/drawingml/2006/main" xmlns:p="http://schemas.openxmlformats.org/presentationml/2006/main">
+      <p:sp>
         <p:nvSpPr>
           <p:cNvPr id="67" name="Observability panel"/>
           <p:cNvSpPr/>
@@ -3165,8 +3147,15 @@
             </a:solidFill>
           </a:ln>
         </p:spPr>
-      </p:sp>
-      <p:sp xmlns:a="http://schemas.openxmlformats.org/drawingml/2006/main" xmlns:p="http://schemas.openxmlformats.org/presentationml/2006/main">
+        <p:txBody>
+          <a:bodyPr/>
+          <a:lstStyle/>
+          <a:p>
+            <a:endParaRPr lang="zh-TW" altLang="en-US"/>
+          </a:p>
+        </p:txBody>
+      </p:sp>
+      <p:sp>
         <p:nvSpPr>
           <p:cNvPr id="68" name="Observability title"/>
           <p:cNvSpPr txBox="1"/>
@@ -3186,14 +3175,14 @@
           </a:ln>
         </p:spPr>
         <p:txBody>
-          <a:bodyPr anchor="ctr" bIns="0" lIns="0" rIns="0" tIns="0" wrap="square">
+          <a:bodyPr wrap="square" lIns="0" tIns="0" rIns="0" bIns="0" anchor="ctr">
             <a:normAutofit/>
           </a:bodyPr>
           <a:lstStyle/>
           <a:p>
             <a:pPr algn="l"/>
             <a:r>
-              <a:rPr b="1" lang="zh-TW" sz="1950">
+              <a:rPr lang="zh-TW" sz="1950" b="1">
                 <a:solidFill>
                   <a:srgbClr val="344054"/>
                 </a:solidFill>
@@ -3206,7 +3195,7 @@
           </a:p>
         </p:txBody>
       </p:sp>
-      <p:sp xmlns:a="http://schemas.openxmlformats.org/drawingml/2006/main" xmlns:p="http://schemas.openxmlformats.org/presentationml/2006/main">
+      <p:sp>
         <p:nvSpPr>
           <p:cNvPr id="69" name="Observability body"/>
           <p:cNvSpPr txBox="1"/>
@@ -3226,14 +3215,14 @@
           </a:ln>
         </p:spPr>
         <p:txBody>
-          <a:bodyPr anchor="t" bIns="0" lIns="0" rIns="0" tIns="76200" wrap="square">
+          <a:bodyPr wrap="square" lIns="0" tIns="76200" rIns="0" bIns="0" anchor="t">
             <a:normAutofit/>
           </a:bodyPr>
           <a:lstStyle/>
           <a:p>
             <a:pPr algn="l"/>
             <a:r>
-              <a:rPr b="0" lang="zh-TW" sz="1475">
+              <a:rPr lang="zh-TW" sz="1475" b="0">
                 <a:solidFill>
                   <a:srgbClr val="101828"/>
                 </a:solidFill>
@@ -3247,7 +3236,7 @@
           <a:p>
             <a:pPr algn="l"/>
             <a:r>
-              <a:rPr b="0" lang="zh-TW" sz="1475">
+              <a:rPr lang="zh-TW" sz="1475" b="0">
                 <a:solidFill>
                   <a:srgbClr val="101828"/>
                 </a:solidFill>
@@ -3260,7 +3249,7 @@
           </a:p>
         </p:txBody>
       </p:sp>
-      <p:sp xmlns:a="http://schemas.openxmlformats.org/drawingml/2006/main" xmlns:p="http://schemas.openxmlformats.org/presentationml/2006/main">
+      <p:sp>
         <p:nvSpPr>
           <p:cNvPr id="70" name="Delivery callout background"/>
           <p:cNvSpPr/>
@@ -3281,8 +3270,15 @@
             <a:noFill/>
           </a:ln>
         </p:spPr>
-      </p:sp>
-      <p:sp xmlns:a="http://schemas.openxmlformats.org/drawingml/2006/main" xmlns:p="http://schemas.openxmlformats.org/presentationml/2006/main">
+        <p:txBody>
+          <a:bodyPr/>
+          <a:lstStyle/>
+          <a:p>
+            <a:endParaRPr lang="zh-TW" altLang="en-US"/>
+          </a:p>
+        </p:txBody>
+      </p:sp>
+      <p:sp>
         <p:nvSpPr>
           <p:cNvPr id="71" name="Delivery callout"/>
           <p:cNvSpPr txBox="1"/>
@@ -3302,14 +3298,14 @@
           </a:ln>
         </p:spPr>
         <p:txBody>
-          <a:bodyPr anchor="ctr" bIns="0" lIns="0" rIns="0" tIns="0" wrap="square">
+          <a:bodyPr wrap="square" lIns="0" tIns="0" rIns="0" bIns="0" anchor="ctr">
             <a:normAutofit/>
           </a:bodyPr>
           <a:lstStyle/>
           <a:p>
             <a:pPr algn="l"/>
             <a:r>
-              <a:rPr b="1" lang="zh-TW" sz="1650">
+              <a:rPr lang="zh-TW" sz="1650" b="1">
                 <a:solidFill>
                   <a:srgbClr val="2563EB"/>
                 </a:solidFill>
@@ -24154,7 +24150,7 @@
 </file>
 
 <file path=ppt/slides/slide5.xml><?xml version="1.0" encoding="utf-8"?>
-<p:sld xmlns:a="http://schemas.openxmlformats.org/drawingml/2006/main" xmlns:p="http://schemas.openxmlformats.org/presentationml/2006/main" xmlns:r="http://schemas.openxmlformats.org/officeDocument/2006/relationships">
+<p:sld xmlns:a="http://schemas.openxmlformats.org/drawingml/2006/main" xmlns:r="http://schemas.openxmlformats.org/officeDocument/2006/relationships" xmlns:p="http://schemas.openxmlformats.org/presentationml/2006/main">
   <p:cSld>
     <p:bg>
       <p:bgPr>
@@ -24207,14 +24203,14 @@
           </a:ln>
         </p:spPr>
         <p:txBody>
-          <a:bodyPr anchor="t" bIns="0" lIns="0" rIns="0" tIns="0" wrap="square">
+          <a:bodyPr wrap="square" lIns="0" tIns="0" rIns="0" bIns="0" anchor="t">
             <a:normAutofit/>
           </a:bodyPr>
           <a:lstStyle/>
           <a:p>
             <a:pPr algn="l">
               <a:buNone/>
-              <a:defRPr b="1" sz="975">
+              <a:defRPr sz="975" b="1">
                 <a:solidFill>
                   <a:srgbClr val="2563EB"/>
                 </a:solidFill>
@@ -24224,7 +24220,7 @@
               </a:defRPr>
             </a:pPr>
             <a:r>
-              <a:rPr b="1" sz="975">
+              <a:rPr sz="975" b="1">
                 <a:solidFill>
                   <a:srgbClr val="2563EB"/>
                 </a:solidFill>
@@ -24266,14 +24262,14 @@
           </a:ln>
         </p:spPr>
         <p:txBody>
-          <a:bodyPr anchor="ctr" bIns="0" lIns="0" rIns="0" tIns="0" wrap="square">
+          <a:bodyPr wrap="square" lIns="0" tIns="0" rIns="0" bIns="0" anchor="ctr">
             <a:normAutofit/>
           </a:bodyPr>
           <a:lstStyle/>
           <a:p>
             <a:pPr>
               <a:buNone/>
-              <a:defRPr b="1" sz="3000">
+              <a:defRPr sz="3000" b="1">
                 <a:solidFill>
                   <a:srgbClr val="111827"/>
                 </a:solidFill>
@@ -24283,7 +24279,7 @@
               </a:defRPr>
             </a:pPr>
             <a:r>
-              <a:rPr b="1" sz="3000">
+              <a:rPr sz="3000" b="1">
                 <a:solidFill>
                   <a:srgbClr val="111827"/>
                 </a:solidFill>
@@ -24347,14 +24343,14 @@
           </a:ln>
         </p:spPr>
         <p:txBody>
-          <a:bodyPr anchor="t" bIns="0" lIns="0" rIns="0" tIns="0" wrap="square">
+          <a:bodyPr wrap="square" lIns="0" tIns="0" rIns="0" bIns="0" anchor="t">
             <a:normAutofit/>
           </a:bodyPr>
           <a:lstStyle/>
           <a:p>
             <a:pPr algn="r">
               <a:buNone/>
-              <a:defRPr b="0" sz="900">
+              <a:defRPr sz="900" b="0">
                 <a:solidFill>
                   <a:srgbClr val="667085"/>
                 </a:solidFill>
@@ -24364,7 +24360,7 @@
               </a:defRPr>
             </a:pPr>
             <a:r>
-              <a:rPr b="0" sz="900">
+              <a:rPr sz="900" b="0">
                 <a:solidFill>
                   <a:srgbClr val="667085"/>
                 </a:solidFill>
@@ -24482,14 +24478,14 @@
           </a:ln>
         </p:spPr>
         <p:txBody>
-          <a:bodyPr anchor="t" bIns="0" lIns="0" rIns="0" tIns="0" wrap="square">
+          <a:bodyPr wrap="square" lIns="0" tIns="0" rIns="0" bIns="0" anchor="t">
             <a:normAutofit/>
           </a:bodyPr>
           <a:lstStyle/>
           <a:p>
             <a:pPr algn="l">
               <a:buNone/>
-              <a:defRPr b="1" sz="1725">
+              <a:defRPr sz="1725" b="1">
                 <a:solidFill>
                   <a:srgbClr val="111827"/>
                 </a:solidFill>
@@ -24499,7 +24495,7 @@
               </a:defRPr>
             </a:pPr>
             <a:r>
-              <a:rPr b="1" sz="1725">
+              <a:rPr sz="1725" b="1">
                 <a:solidFill>
                   <a:srgbClr val="111827"/>
                 </a:solidFill>
@@ -24541,14 +24537,14 @@
           </a:ln>
         </p:spPr>
         <p:txBody>
-          <a:bodyPr anchor="t" bIns="0" lIns="0" rIns="0" tIns="0" wrap="square">
+          <a:bodyPr wrap="square" lIns="0" tIns="0" rIns="0" bIns="0" anchor="t">
             <a:normAutofit/>
           </a:bodyPr>
           <a:lstStyle/>
           <a:p>
             <a:pPr algn="l">
               <a:buNone/>
-              <a:defRPr b="0" sz="1425">
+              <a:defRPr sz="1425" b="0">
                 <a:solidFill>
                   <a:srgbClr val="111827"/>
                 </a:solidFill>
@@ -24558,7 +24554,7 @@
               </a:defRPr>
             </a:pPr>
             <a:r>
-              <a:rPr b="0" sz="1425">
+              <a:rPr sz="1425" b="0">
                 <a:solidFill>
                   <a:srgbClr val="111827"/>
                 </a:solidFill>
@@ -24572,7 +24568,7 @@
           <a:p>
             <a:pPr algn="l">
               <a:buNone/>
-              <a:defRPr b="0" sz="1425">
+              <a:defRPr sz="1425" b="0">
                 <a:solidFill>
                   <a:srgbClr val="111827"/>
                 </a:solidFill>
@@ -24582,7 +24578,7 @@
               </a:defRPr>
             </a:pPr>
             <a:r>
-              <a:rPr b="0" sz="1425">
+              <a:rPr sz="1425" b="0">
                 <a:solidFill>
                   <a:srgbClr val="111827"/>
                 </a:solidFill>
@@ -24700,14 +24696,14 @@
           </a:ln>
         </p:spPr>
         <p:txBody>
-          <a:bodyPr anchor="t" bIns="0" lIns="0" rIns="0" tIns="0" wrap="square">
+          <a:bodyPr wrap="square" lIns="0" tIns="0" rIns="0" bIns="0" anchor="t">
             <a:normAutofit/>
           </a:bodyPr>
           <a:lstStyle/>
           <a:p>
             <a:pPr algn="l">
               <a:buNone/>
-              <a:defRPr b="1" sz="1725">
+              <a:defRPr sz="1725" b="1">
                 <a:solidFill>
                   <a:srgbClr val="111827"/>
                 </a:solidFill>
@@ -24717,7 +24713,7 @@
               </a:defRPr>
             </a:pPr>
             <a:r>
-              <a:rPr b="1" sz="1725">
+              <a:rPr sz="1725" b="1">
                 <a:solidFill>
                   <a:srgbClr val="111827"/>
                 </a:solidFill>
@@ -24759,14 +24755,14 @@
           </a:ln>
         </p:spPr>
         <p:txBody>
-          <a:bodyPr anchor="t" bIns="0" lIns="0" rIns="0" tIns="0" wrap="square">
+          <a:bodyPr wrap="square" lIns="0" tIns="0" rIns="0" bIns="0" anchor="t">
             <a:normAutofit/>
           </a:bodyPr>
           <a:lstStyle/>
           <a:p>
             <a:pPr algn="l">
               <a:buNone/>
-              <a:defRPr b="0" sz="1425">
+              <a:defRPr sz="1425" b="0">
                 <a:solidFill>
                   <a:srgbClr val="111827"/>
                 </a:solidFill>
@@ -24776,7 +24772,7 @@
               </a:defRPr>
             </a:pPr>
             <a:r>
-              <a:rPr b="0" sz="1425">
+              <a:rPr sz="1425" b="0">
                 <a:solidFill>
                   <a:srgbClr val="111827"/>
                 </a:solidFill>
@@ -24790,7 +24786,7 @@
           <a:p>
             <a:pPr algn="l">
               <a:buNone/>
-              <a:defRPr b="0" sz="1425">
+              <a:defRPr sz="1425" b="0">
                 <a:solidFill>
                   <a:srgbClr val="111827"/>
                 </a:solidFill>
@@ -24800,7 +24796,7 @@
               </a:defRPr>
             </a:pPr>
             <a:r>
-              <a:rPr b="0" sz="1425">
+              <a:rPr sz="1425" b="0">
                 <a:solidFill>
                   <a:srgbClr val="111827"/>
                 </a:solidFill>
@@ -24814,7 +24810,7 @@
           <a:p>
             <a:pPr algn="l">
               <a:buNone/>
-              <a:defRPr b="0" sz="1425">
+              <a:defRPr sz="1425" b="0">
                 <a:solidFill>
                   <a:srgbClr val="111827"/>
                 </a:solidFill>
@@ -24824,7 +24820,7 @@
               </a:defRPr>
             </a:pPr>
             <a:r>
-              <a:rPr b="0" sz="1425">
+              <a:rPr sz="1425" b="0">
                 <a:solidFill>
                   <a:srgbClr val="111827"/>
                 </a:solidFill>
@@ -24942,14 +24938,14 @@
           </a:ln>
         </p:spPr>
         <p:txBody>
-          <a:bodyPr anchor="t" bIns="0" lIns="0" rIns="0" tIns="0" wrap="square">
+          <a:bodyPr wrap="square" lIns="0" tIns="0" rIns="0" bIns="0" anchor="t">
             <a:normAutofit/>
           </a:bodyPr>
           <a:lstStyle/>
           <a:p>
             <a:pPr algn="l">
               <a:buNone/>
-              <a:defRPr b="1" sz="1725">
+              <a:defRPr sz="1725" b="1">
                 <a:solidFill>
                   <a:srgbClr val="111827"/>
                 </a:solidFill>
@@ -24959,7 +24955,7 @@
               </a:defRPr>
             </a:pPr>
             <a:r>
-              <a:rPr b="1" sz="1725">
+              <a:rPr sz="1725" b="1">
                 <a:solidFill>
                   <a:srgbClr val="111827"/>
                 </a:solidFill>
@@ -25001,14 +24997,14 @@
           </a:ln>
         </p:spPr>
         <p:txBody>
-          <a:bodyPr anchor="t" bIns="0" lIns="0" rIns="0" tIns="0" wrap="square">
+          <a:bodyPr wrap="square" lIns="0" tIns="0" rIns="0" bIns="0" anchor="t">
             <a:normAutofit/>
           </a:bodyPr>
           <a:lstStyle/>
           <a:p>
             <a:pPr>
               <a:buNone/>
-              <a:defRPr b="0" sz="1425">
+              <a:defRPr sz="1425" b="0">
                 <a:solidFill>
                   <a:srgbClr val="111827"/>
                 </a:solidFill>
@@ -25018,7 +25014,7 @@
               </a:defRPr>
             </a:pPr>
             <a:r>
-              <a:rPr b="0" sz="1425">
+              <a:rPr sz="1425" b="0">
                 <a:solidFill>
                   <a:srgbClr val="111827"/>
                 </a:solidFill>
@@ -25032,7 +25028,7 @@
           <a:p>
             <a:pPr>
               <a:buNone/>
-              <a:defRPr b="0" sz="1425">
+              <a:defRPr sz="1425" b="0">
                 <a:solidFill>
                   <a:srgbClr val="111827"/>
                 </a:solidFill>
@@ -25042,7 +25038,7 @@
               </a:defRPr>
             </a:pPr>
             <a:r>
-              <a:rPr b="0" sz="1425">
+              <a:rPr sz="1425" b="0">
                 <a:solidFill>
                   <a:srgbClr val="111827"/>
                 </a:solidFill>
@@ -25056,7 +25052,7 @@
           <a:p>
             <a:pPr>
               <a:buNone/>
-              <a:defRPr b="0" sz="1425">
+              <a:defRPr sz="1425" b="0">
                 <a:solidFill>
                   <a:srgbClr val="111827"/>
                 </a:solidFill>
@@ -25066,7 +25062,7 @@
               </a:defRPr>
             </a:pPr>
             <a:r>
-              <a:rPr b="0" sz="1425">
+              <a:rPr sz="1425" b="0">
                 <a:solidFill>
                   <a:srgbClr val="111827"/>
                 </a:solidFill>
@@ -25184,14 +25180,14 @@
           </a:ln>
         </p:spPr>
         <p:txBody>
-          <a:bodyPr anchor="t" bIns="0" lIns="0" rIns="0" tIns="0" wrap="square">
+          <a:bodyPr wrap="square" lIns="0" tIns="0" rIns="0" bIns="0" anchor="t">
             <a:normAutofit/>
           </a:bodyPr>
           <a:lstStyle/>
           <a:p>
             <a:pPr algn="l">
               <a:buNone/>
-              <a:defRPr b="1" sz="1725">
+              <a:defRPr sz="1725" b="1">
                 <a:solidFill>
                   <a:srgbClr val="111827"/>
                 </a:solidFill>
@@ -25201,7 +25197,7 @@
               </a:defRPr>
             </a:pPr>
             <a:r>
-              <a:rPr b="1" sz="1725">
+              <a:rPr sz="1725" b="1">
                 <a:solidFill>
                   <a:srgbClr val="111827"/>
                 </a:solidFill>
@@ -25243,14 +25239,14 @@
           </a:ln>
         </p:spPr>
         <p:txBody>
-          <a:bodyPr anchor="t" bIns="0" lIns="0" rIns="0" tIns="0" wrap="square">
+          <a:bodyPr wrap="square" lIns="0" tIns="0" rIns="0" bIns="0" anchor="t">
             <a:normAutofit/>
           </a:bodyPr>
           <a:lstStyle/>
           <a:p>
             <a:pPr algn="l">
               <a:buNone/>
-              <a:defRPr b="0" sz="1425">
+              <a:defRPr sz="1425" b="0">
                 <a:solidFill>
                   <a:srgbClr val="111827"/>
                 </a:solidFill>
@@ -25260,7 +25256,7 @@
               </a:defRPr>
             </a:pPr>
             <a:r>
-              <a:rPr dirty="0" sz="1425">
+              <a:rPr sz="1425" dirty="0">
                 <a:solidFill>
                   <a:srgbClr val="111827"/>
                 </a:solidFill>
@@ -25274,7 +25270,7 @@
           <a:p>
             <a:pPr algn="l">
               <a:buNone/>
-              <a:defRPr b="0" sz="1425">
+              <a:defRPr sz="1425" b="0">
                 <a:solidFill>
                   <a:srgbClr val="111827"/>
                 </a:solidFill>
@@ -25284,7 +25280,7 @@
               </a:defRPr>
             </a:pPr>
             <a:r>
-              <a:rPr dirty="0" sz="1425">
+              <a:rPr sz="1425" dirty="0">
                 <a:solidFill>
                   <a:srgbClr val="111827"/>
                 </a:solidFill>
@@ -25298,7 +25294,7 @@
           <a:p>
             <a:pPr algn="l">
               <a:buNone/>
-              <a:defRPr b="0" sz="1425">
+              <a:defRPr sz="1425" b="0">
                 <a:solidFill>
                   <a:srgbClr val="111827"/>
                 </a:solidFill>
@@ -25308,7 +25304,7 @@
               </a:defRPr>
             </a:pPr>
             <a:r>
-              <a:rPr dirty="0" sz="1425">
+              <a:rPr sz="1425" dirty="0">
                 <a:solidFill>
                   <a:srgbClr val="111827"/>
                 </a:solidFill>
@@ -25322,7 +25318,7 @@
           <a:p>
             <a:pPr algn="l">
               <a:buNone/>
-              <a:defRPr b="0" sz="1425">
+              <a:defRPr sz="1425" b="0">
                 <a:solidFill>
                   <a:srgbClr val="111827"/>
                 </a:solidFill>
@@ -25332,7 +25328,7 @@
               </a:defRPr>
             </a:pPr>
             <a:r>
-              <a:rPr dirty="0" sz="1425">
+              <a:rPr sz="1425" dirty="0">
                 <a:solidFill>
                   <a:srgbClr val="111827"/>
                 </a:solidFill>
@@ -25412,14 +25408,14 @@
           </a:ln>
         </p:spPr>
         <p:txBody>
-          <a:bodyPr anchor="ctr" bIns="0" lIns="0" rIns="0" tIns="0" wrap="square">
+          <a:bodyPr wrap="square" lIns="0" tIns="0" rIns="0" bIns="0" anchor="ctr">
             <a:normAutofit/>
           </a:bodyPr>
           <a:lstStyle/>
           <a:p>
             <a:pPr>
               <a:buNone/>
-              <a:defRPr b="1" sz="1800">
+              <a:defRPr sz="1800" b="1">
                 <a:solidFill>
                   <a:srgbClr val="2563EB"/>
                 </a:solidFill>
@@ -25429,7 +25425,7 @@
               </a:defRPr>
             </a:pPr>
             <a:r>
-              <a:rPr b="1" dirty="0" err="1" sz="1800">
+              <a:rPr sz="1800" b="1" dirty="0" err="1">
                 <a:solidFill>
                   <a:srgbClr val="2563EB"/>
                 </a:solidFill>
@@ -25471,14 +25467,14 @@
           </a:ln>
         </p:spPr>
         <p:txBody>
-          <a:bodyPr anchor="t" bIns="0" lIns="0" rIns="0" tIns="0" wrap="square">
+          <a:bodyPr wrap="square" lIns="0" tIns="0" rIns="0" bIns="0" anchor="t">
             <a:normAutofit/>
           </a:bodyPr>
           <a:lstStyle/>
           <a:p>
             <a:pPr algn="l">
               <a:buNone/>
-              <a:defRPr b="0" sz="750">
+              <a:defRPr sz="750" b="0">
                 <a:solidFill>
                   <a:srgbClr val="667085"/>
                 </a:solidFill>
@@ -25488,7 +25484,7 @@
               </a:defRPr>
             </a:pPr>
             <a:r>
-              <a:rPr b="0" sz="750">
+              <a:rPr sz="750" b="0">
                 <a:solidFill>
                   <a:srgbClr val="667085"/>
                 </a:solidFill>
@@ -25515,7 +25511,7 @@
 </file>
 
 <file path=ppt/slides/slide6.xml><?xml version="1.0" encoding="utf-8"?>
-<p:sld xmlns:a="http://schemas.openxmlformats.org/drawingml/2006/main" xmlns:p="http://schemas.openxmlformats.org/presentationml/2006/main" xmlns:r="http://schemas.openxmlformats.org/officeDocument/2006/relationships">
+<p:sld xmlns:a="http://schemas.openxmlformats.org/drawingml/2006/main" xmlns:r="http://schemas.openxmlformats.org/officeDocument/2006/relationships" xmlns:p="http://schemas.openxmlformats.org/presentationml/2006/main">
   <p:cSld>
     <p:bg>
       <p:bgPr>
@@ -25568,14 +25564,14 @@
           </a:ln>
         </p:spPr>
         <p:txBody>
-          <a:bodyPr anchor="t" bIns="0" lIns="0" rIns="0" tIns="0" wrap="square">
+          <a:bodyPr wrap="square" lIns="0" tIns="0" rIns="0" bIns="0" anchor="t">
             <a:normAutofit/>
           </a:bodyPr>
           <a:lstStyle/>
           <a:p>
             <a:pPr algn="l">
               <a:buNone/>
-              <a:defRPr b="1" sz="975">
+              <a:defRPr sz="975" b="1">
                 <a:solidFill>
                   <a:srgbClr val="2563EB"/>
                 </a:solidFill>
@@ -25585,7 +25581,7 @@
               </a:defRPr>
             </a:pPr>
             <a:r>
-              <a:rPr b="1" sz="975">
+              <a:rPr sz="975" b="1">
                 <a:solidFill>
                   <a:srgbClr val="2563EB"/>
                 </a:solidFill>
@@ -25627,14 +25623,14 @@
           </a:ln>
         </p:spPr>
         <p:txBody>
-          <a:bodyPr anchor="ctr" bIns="0" lIns="0" rIns="0" tIns="0" wrap="square">
+          <a:bodyPr wrap="square" lIns="0" tIns="0" rIns="0" bIns="0" anchor="ctr">
             <a:normAutofit/>
           </a:bodyPr>
           <a:lstStyle/>
           <a:p>
             <a:pPr algn="l">
               <a:buNone/>
-              <a:defRPr b="1" sz="3150">
+              <a:defRPr sz="3150" b="1">
                 <a:solidFill>
                   <a:srgbClr val="101828"/>
                 </a:solidFill>
@@ -25644,7 +25640,7 @@
               </a:defRPr>
             </a:pPr>
             <a:r>
-              <a:rPr b="1" dirty="0" err="1" sz="3150">
+              <a:rPr sz="3150" b="1" dirty="0" err="1">
                 <a:solidFill>
                   <a:srgbClr val="101828"/>
                 </a:solidFill>
@@ -25655,7 +25651,7 @@
               <a:t>目標不變；交付路線改為</a:t>
             </a:r>
             <a:r>
-              <a:rPr b="1" dirty="0" sz="3150">
+              <a:rPr sz="3150" b="1" dirty="0">
                 <a:solidFill>
                   <a:srgbClr val="101828"/>
                 </a:solidFill>
@@ -25719,14 +25715,14 @@
           </a:ln>
         </p:spPr>
         <p:txBody>
-          <a:bodyPr anchor="t" bIns="0" lIns="0" rIns="0" tIns="0" wrap="square">
+          <a:bodyPr wrap="square" lIns="0" tIns="0" rIns="0" bIns="0" anchor="t">
             <a:normAutofit/>
           </a:bodyPr>
           <a:lstStyle/>
           <a:p>
             <a:pPr algn="r">
               <a:buNone/>
-              <a:defRPr b="0" sz="900">
+              <a:defRPr sz="900" b="0">
                 <a:solidFill>
                   <a:srgbClr val="667085"/>
                 </a:solidFill>
@@ -25736,7 +25732,7 @@
               </a:defRPr>
             </a:pPr>
             <a:r>
-              <a:rPr b="0" sz="900">
+              <a:rPr sz="900" b="0">
                 <a:solidFill>
                   <a:srgbClr val="667085"/>
                 </a:solidFill>
@@ -25782,14 +25778,14 @@
           </a:ln>
         </p:spPr>
         <p:txBody>
-          <a:bodyPr anchor="ctr" bIns="95250" lIns="228600" rIns="228600" tIns="95250" wrap="square">
+          <a:bodyPr wrap="square" lIns="228600" tIns="95250" rIns="228600" bIns="95250" anchor="ctr">
             <a:normAutofit/>
           </a:bodyPr>
           <a:lstStyle/>
           <a:p>
             <a:pPr algn="l">
               <a:buNone/>
-              <a:defRPr b="1" sz="1500">
+              <a:defRPr sz="1500" b="1">
                 <a:solidFill>
                   <a:srgbClr val="101828"/>
                 </a:solidFill>
@@ -25799,7 +25795,7 @@
               </a:defRPr>
             </a:pPr>
             <a:r>
-              <a:rPr b="1" dirty="0" lang="en-US" sz="1500">
+              <a:rPr lang="en-US" sz="1500" b="1" dirty="0">
                 <a:solidFill>
                   <a:srgbClr val="101828"/>
                 </a:solidFill>
@@ -25810,7 +25806,7 @@
               <a:t>- </a:t>
             </a:r>
             <a:r>
-              <a:rPr b="1" dirty="0" err="1" sz="1500">
+              <a:rPr sz="1500" b="1" dirty="0" err="1">
                 <a:solidFill>
                   <a:srgbClr val="101828"/>
                 </a:solidFill>
@@ -25821,7 +25817,7 @@
               <a:t>代表性</a:t>
             </a:r>
             <a:r>
-              <a:rPr b="1" dirty="0" sz="1500">
+              <a:rPr sz="1500" b="1" dirty="0">
                 <a:solidFill>
                   <a:srgbClr val="101828"/>
                 </a:solidFill>
@@ -25832,7 +25828,7 @@
               <a:t> MySQL </a:t>
             </a:r>
             <a:r>
-              <a:rPr b="1" dirty="0" err="1" sz="1500">
+              <a:rPr sz="1500" b="1" dirty="0" err="1">
                 <a:solidFill>
                   <a:srgbClr val="101828"/>
                 </a:solidFill>
@@ -25843,7 +25839,7 @@
               <a:t>應用</a:t>
             </a:r>
             <a:r>
-              <a:rPr b="1" dirty="0" sz="1500">
+              <a:rPr sz="1500" b="1" dirty="0">
                 <a:solidFill>
                   <a:srgbClr val="101828"/>
                 </a:solidFill>
@@ -25854,7 +25850,7 @@
               <a:t> Pilot</a:t>
             </a:r>
             <a:r>
-              <a:rPr b="1" dirty="0" lang="en-US" sz="1500">
+              <a:rPr lang="en-US" sz="1500" b="1" dirty="0">
                 <a:solidFill>
                   <a:srgbClr val="101828"/>
                 </a:solidFill>
@@ -25865,7 +25861,7 @@
               <a:t> (EX: Account Center) </a:t>
             </a:r>
             <a:r>
-              <a:rPr b="1" dirty="0" sz="1500">
+              <a:rPr sz="1500" b="1" dirty="0">
                 <a:solidFill>
                   <a:srgbClr val="101828"/>
                 </a:solidFill>
@@ -25876,7 +25872,7 @@
               <a:t>；</a:t>
             </a:r>
             <a:r>
-              <a:rPr b="1" dirty="0" err="1" lang="en-US" sz="1500">
+              <a:rPr lang="en-US" sz="1500" b="1" dirty="0" err="1">
                 <a:solidFill>
                   <a:srgbClr val="101828"/>
                 </a:solidFill>
@@ -25887,7 +25883,7 @@
               <a:t>下一個挑戰是</a:t>
             </a:r>
             <a:r>
-              <a:rPr b="1" dirty="0" sz="1500">
+              <a:rPr sz="1500" b="1" dirty="0">
                 <a:solidFill>
                   <a:srgbClr val="101828"/>
                 </a:solidFill>
@@ -25898,7 +25894,7 @@
               <a:t> IDC + EDC </a:t>
             </a:r>
             <a:r>
-              <a:rPr b="1" dirty="0" err="1" sz="1500">
+              <a:rPr sz="1500" b="1" dirty="0" err="1">
                 <a:solidFill>
                   <a:srgbClr val="101828"/>
                 </a:solidFill>
@@ -25909,7 +25905,7 @@
               <a:t>跨區架構</a:t>
             </a:r>
             <a:r>
-              <a:rPr b="1" dirty="0" sz="1500">
+              <a:rPr sz="1500" b="1" dirty="0">
                 <a:solidFill>
                   <a:srgbClr val="101828"/>
                 </a:solidFill>
@@ -25923,7 +25919,7 @@
           <a:p>
             <a:pPr algn="l">
               <a:buNone/>
-              <a:defRPr b="1" sz="1500">
+              <a:defRPr sz="1500" b="1">
                 <a:solidFill>
                   <a:srgbClr val="101828"/>
                 </a:solidFill>
@@ -25933,7 +25929,7 @@
               </a:defRPr>
             </a:pPr>
             <a:r>
-              <a:rPr b="1" dirty="0" lang="en-US" sz="1500">
+              <a:rPr lang="en-US" sz="1500" b="1" dirty="0">
                 <a:solidFill>
                   <a:srgbClr val="101828"/>
                 </a:solidFill>
@@ -25944,7 +25940,7 @@
               <a:t>- </a:t>
             </a:r>
             <a:r>
-              <a:rPr b="1" dirty="0" err="1" sz="1500">
+              <a:rPr sz="1500" b="1" dirty="0" err="1">
                 <a:solidFill>
                   <a:srgbClr val="101828"/>
                 </a:solidFill>
@@ -25955,7 +25951,7 @@
               <a:t>目前</a:t>
             </a:r>
             <a:r>
-              <a:rPr b="1" dirty="0" sz="1500">
+              <a:rPr sz="1500" b="1" dirty="0">
                 <a:solidFill>
                   <a:srgbClr val="101828"/>
                 </a:solidFill>
@@ -25966,7 +25962,7 @@
               <a:t> 104 B、C Agent </a:t>
             </a:r>
             <a:r>
-              <a:rPr b="1" dirty="0" err="1" sz="1500">
+              <a:rPr sz="1500" b="1" dirty="0" err="1">
                 <a:solidFill>
                   <a:srgbClr val="101828"/>
                 </a:solidFill>
@@ -25977,7 +25973,7 @@
               <a:t>服務未來可視為跨區架構的強需求情境</a:t>
             </a:r>
             <a:r>
-              <a:rPr b="1" dirty="0" sz="1500">
+              <a:rPr sz="1500" b="1" dirty="0">
                 <a:solidFill>
                   <a:srgbClr val="101828"/>
                 </a:solidFill>
@@ -25988,7 +25984,7 @@
               <a:t>。</a:t>
             </a:r>
             <a:br>
-              <a:rPr b="1" dirty="0" lang="en-US" sz="1500">
+              <a:rPr lang="en-US" sz="1500" b="1" dirty="0">
                 <a:solidFill>
                   <a:srgbClr val="101828"/>
                 </a:solidFill>
@@ -25998,7 +25994,7 @@
               </a:rPr>
             </a:br>
             <a:r>
-              <a:rPr b="1" dirty="0" lang="en-US" sz="1500">
+              <a:rPr lang="en-US" sz="1500" b="1" dirty="0">
                 <a:solidFill>
                   <a:srgbClr val="101828"/>
                 </a:solidFill>
@@ -26009,19 +26005,19 @@
               <a:t>- </a:t>
             </a:r>
             <a:r>
-              <a:rPr b="1" dirty="0" lang="en-US" sz="1500">
+              <a:rPr lang="en-US" sz="1500" b="1" dirty="0">
                 <a:solidFill>
                   <a:srgbClr val="101828"/>
                 </a:solidFill>
                 <a:latin typeface="Arial"/>
                 <a:ea typeface="Arial"/>
                 <a:cs typeface="Arial"/>
-                <a:hlinkClick action="ppaction://hlinksldjump" r:id="rId3"/>
+                <a:hlinkClick r:id="rId3" action="ppaction://hlinksldjump"/>
               </a:rPr>
               <a:t>決策表 1</a:t>
             </a:r>
             <a:r>
-              <a:rPr b="1" dirty="0" lang="en-US" sz="1500">
+              <a:rPr lang="en-US" sz="1500" b="1" dirty="0">
                 <a:solidFill>
                   <a:srgbClr val="101828"/>
                 </a:solidFill>
@@ -26032,18 +26028,18 @@
               <a:t> / </a:t>
             </a:r>
             <a:r>
-              <a:rPr b="1" dirty="0" lang="en-US" sz="1500">
+              <a:rPr lang="en-US" sz="1500" b="1" dirty="0">
                 <a:solidFill>
                   <a:srgbClr val="101828"/>
                 </a:solidFill>
                 <a:latin typeface="Arial"/>
                 <a:ea typeface="Arial"/>
                 <a:cs typeface="Arial"/>
-                <a:hlinkClick action="ppaction://hlinksldjump" r:id="rId4"/>
+                <a:hlinkClick r:id="rId4" action="ppaction://hlinksldjump"/>
               </a:rPr>
               <a:t>決策表 2</a:t>
             </a:r>
-            <a:endParaRPr altLang="en-US" b="1" dirty="0" lang="zh-TW" sz="1500">
+            <a:endParaRPr lang="zh-TW" altLang="en-US" sz="1500" b="1" dirty="0">
               <a:solidFill>
                 <a:srgbClr val="101828"/>
               </a:solidFill>
@@ -26055,7 +26051,7 @@
           <a:p>
             <a:pPr algn="l">
               <a:buNone/>
-              <a:defRPr b="1" sz="1500">
+              <a:defRPr sz="1500" b="1">
                 <a:solidFill>
                   <a:srgbClr val="101828"/>
                 </a:solidFill>
@@ -26064,7 +26060,7 @@
                 <a:cs typeface="Arial"/>
               </a:defRPr>
             </a:pPr>
-            <a:endParaRPr altLang="en-US" b="1" dirty="0" lang="zh-TW" sz="1500">
+            <a:endParaRPr lang="zh-TW" altLang="en-US" sz="1500" b="1" dirty="0">
               <a:solidFill>
                 <a:srgbClr val="101828"/>
               </a:solidFill>
@@ -26144,14 +26140,14 @@
           </a:ln>
         </p:spPr>
         <p:txBody>
-          <a:bodyPr anchor="t" bIns="0" lIns="0" rIns="0" tIns="0" wrap="square">
+          <a:bodyPr wrap="square" lIns="0" tIns="0" rIns="0" bIns="0" anchor="t">
             <a:normAutofit/>
           </a:bodyPr>
           <a:lstStyle/>
           <a:p>
             <a:pPr algn="l">
               <a:buNone/>
-              <a:defRPr b="1" sz="1500">
+              <a:defRPr sz="1500" b="1">
                 <a:solidFill>
                   <a:srgbClr val="101828"/>
                 </a:solidFill>
@@ -26161,7 +26157,7 @@
               </a:defRPr>
             </a:pPr>
             <a:r>
-              <a:rPr b="1" sz="1500">
+              <a:rPr sz="1500" b="1">
                 <a:solidFill>
                   <a:srgbClr val="101828"/>
                 </a:solidFill>
@@ -26203,7 +26199,7 @@
           </a:ln>
         </p:spPr>
         <p:txBody>
-          <a:bodyPr anchor="t" bIns="0" lIns="0" rIns="0" tIns="0" wrap="square">
+          <a:bodyPr wrap="square" lIns="0" tIns="0" rIns="0" bIns="0" anchor="t">
             <a:normAutofit/>
           </a:bodyPr>
           <a:lstStyle/>
@@ -26213,7 +26209,7 @@
                 <a:spcPct val="105000"/>
               </a:lnSpc>
               <a:buNone/>
-              <a:defRPr b="0" sz="1275">
+              <a:defRPr sz="1275" b="0">
                 <a:solidFill>
                   <a:srgbClr val="101828"/>
                 </a:solidFill>
@@ -26223,7 +26219,7 @@
               </a:defRPr>
             </a:pPr>
             <a:r>
-              <a:rPr b="0" dirty="0" lang="en-US" sz="1275">
+              <a:rPr lang="en-US" sz="1275" b="0" dirty="0">
                 <a:solidFill>
                   <a:srgbClr val="101828"/>
                 </a:solidFill>
@@ -26234,7 +26230,7 @@
               <a:t>- </a:t>
             </a:r>
             <a:r>
-              <a:rPr b="0" dirty="0" sz="1275">
+              <a:rPr sz="1275" b="0" dirty="0">
                 <a:solidFill>
                   <a:srgbClr val="101828"/>
                 </a:solidFill>
@@ -26245,7 +26241,7 @@
               <a:t>MySQL｜p99 37.7 </a:t>
             </a:r>
             <a:r>
-              <a:rPr b="0" dirty="0" err="1" sz="1275">
+              <a:rPr sz="1275" b="0" dirty="0" err="1">
                 <a:solidFill>
                   <a:srgbClr val="101828"/>
                 </a:solidFill>
@@ -26255,7 +26251,7 @@
               </a:rPr>
               <a:t>ms</a:t>
             </a:r>
-            <a:endParaRPr b="0" dirty="0" sz="1275">
+            <a:endParaRPr sz="1275" b="0" dirty="0">
               <a:solidFill>
                 <a:srgbClr val="101828"/>
               </a:solidFill>
@@ -26270,7 +26266,7 @@
                 <a:spcPct val="105000"/>
               </a:lnSpc>
               <a:buNone/>
-              <a:defRPr b="0" sz="1275">
+              <a:defRPr sz="1275" b="0">
                 <a:solidFill>
                   <a:srgbClr val="101828"/>
                 </a:solidFill>
@@ -26280,7 +26276,7 @@
               </a:defRPr>
             </a:pPr>
             <a:r>
-              <a:rPr b="0" dirty="0" lang="en-US" sz="1275">
+              <a:rPr lang="en-US" sz="1275" b="0" dirty="0">
                 <a:solidFill>
                   <a:srgbClr val="101828"/>
                 </a:solidFill>
@@ -26291,7 +26287,7 @@
               <a:t>- </a:t>
             </a:r>
             <a:r>
-              <a:rPr b="0" dirty="0" sz="1275">
+              <a:rPr sz="1275" b="0" dirty="0">
                 <a:solidFill>
                   <a:srgbClr val="101828"/>
                 </a:solidFill>
@@ -26308,7 +26304,7 @@
                 <a:spcPct val="105000"/>
               </a:lnSpc>
               <a:buNone/>
-              <a:defRPr b="0" sz="1275">
+              <a:defRPr sz="1275" b="0">
                 <a:solidFill>
                   <a:srgbClr val="101828"/>
                 </a:solidFill>
@@ -26318,7 +26314,7 @@
               </a:defRPr>
             </a:pPr>
             <a:r>
-              <a:rPr b="0" dirty="0" lang="en-US" sz="1275">
+              <a:rPr lang="en-US" sz="1275" b="0" dirty="0">
                 <a:solidFill>
                   <a:srgbClr val="101828"/>
                 </a:solidFill>
@@ -26329,7 +26325,7 @@
               <a:t>- </a:t>
             </a:r>
             <a:r>
-              <a:rPr b="0" dirty="0" sz="1275">
+              <a:rPr sz="1275" b="0" dirty="0">
                 <a:solidFill>
                   <a:srgbClr val="101828"/>
                 </a:solidFill>
@@ -26340,7 +26336,7 @@
               <a:t>P-A × A/S 298.8 </a:t>
             </a:r>
             <a:r>
-              <a:rPr b="0" dirty="0" err="1" sz="1275">
+              <a:rPr sz="1275" b="0" dirty="0" err="1">
                 <a:solidFill>
                   <a:srgbClr val="101828"/>
                 </a:solidFill>
@@ -26350,7 +26346,7 @@
               </a:rPr>
               <a:t>tpmC</a:t>
             </a:r>
-            <a:endParaRPr b="0" dirty="0" sz="1275">
+            <a:endParaRPr sz="1275" b="0" dirty="0">
               <a:solidFill>
                 <a:srgbClr val="101828"/>
               </a:solidFill>
@@ -26390,7 +26386,7 @@
           </a:ln>
         </p:spPr>
         <p:txBody>
-          <a:bodyPr anchor="t" bIns="0" lIns="0" rIns="0" tIns="0" wrap="square">
+          <a:bodyPr wrap="square" lIns="0" tIns="0" rIns="0" bIns="0" anchor="t">
             <a:normAutofit/>
           </a:bodyPr>
           <a:lstStyle/>
@@ -26400,7 +26396,7 @@
                 <a:spcPct val="105000"/>
               </a:lnSpc>
               <a:buNone/>
-              <a:defRPr b="0" sz="1050">
+              <a:defRPr sz="1050" b="0">
                 <a:solidFill>
                   <a:srgbClr val="667085"/>
                 </a:solidFill>
@@ -26410,7 +26406,7 @@
               </a:defRPr>
             </a:pPr>
             <a:r>
-              <a:rPr dirty="0" err="1" lang="en-US" sz="1050">
+              <a:rPr lang="en-US" sz="1050" dirty="0" err="1">
                 <a:solidFill>
                   <a:srgbClr val="667085"/>
                 </a:solidFill>
@@ -26421,7 +26417,7 @@
               <a:t>同區</a:t>
             </a:r>
             <a:r>
-              <a:rPr b="0" dirty="0" err="1" sz="1050">
+              <a:rPr sz="1050" b="0" dirty="0" err="1">
                 <a:solidFill>
                   <a:srgbClr val="667085"/>
                 </a:solidFill>
@@ -26432,7 +26428,7 @@
               <a:t>低延遲；無</a:t>
             </a:r>
             <a:r>
-              <a:rPr b="0" dirty="0" sz="1050">
+              <a:rPr sz="1050" b="0" dirty="0">
                 <a:solidFill>
                   <a:srgbClr val="667085"/>
                 </a:solidFill>
@@ -26443,7 +26439,7 @@
               <a:t> </a:t>
             </a:r>
             <a:r>
-              <a:rPr b="0" dirty="0" err="1" sz="1050">
+              <a:rPr sz="1050" b="0" dirty="0" err="1">
                 <a:solidFill>
                   <a:srgbClr val="667085"/>
                 </a:solidFill>
@@ -26454,7 +26450,7 @@
               <a:t>placement／near-read</a:t>
             </a:r>
             <a:r>
-              <a:rPr b="0" dirty="0" sz="1050">
+              <a:rPr sz="1050" b="0" dirty="0">
                 <a:solidFill>
                   <a:srgbClr val="667085"/>
                 </a:solidFill>
@@ -26465,7 +26461,7 @@
               <a:t> </a:t>
             </a:r>
             <a:r>
-              <a:rPr b="0" dirty="0" err="1" sz="1050">
+              <a:rPr sz="1050" b="0" dirty="0" err="1">
                 <a:solidFill>
                   <a:srgbClr val="667085"/>
                 </a:solidFill>
@@ -26475,7 +26471,7 @@
               </a:rPr>
               <a:t>等價能力</a:t>
             </a:r>
-            <a:endParaRPr b="0" dirty="0" sz="1050">
+            <a:endParaRPr sz="1050" b="0" dirty="0">
               <a:solidFill>
                 <a:srgbClr val="667085"/>
               </a:solidFill>
@@ -26555,14 +26551,14 @@
           </a:ln>
         </p:spPr>
         <p:txBody>
-          <a:bodyPr anchor="t" bIns="0" lIns="0" rIns="0" tIns="0" wrap="square">
+          <a:bodyPr wrap="square" lIns="0" tIns="0" rIns="0" bIns="0" anchor="t">
             <a:normAutofit/>
           </a:bodyPr>
           <a:lstStyle/>
           <a:p>
             <a:pPr algn="l">
               <a:buNone/>
-              <a:defRPr b="1" sz="1500">
+              <a:defRPr sz="1500" b="1">
                 <a:solidFill>
                   <a:srgbClr val="2563EB"/>
                 </a:solidFill>
@@ -26572,7 +26568,7 @@
               </a:defRPr>
             </a:pPr>
             <a:r>
-              <a:rPr b="1" dirty="0" err="1" sz="1500">
+              <a:rPr sz="1500" b="1" dirty="0" err="1">
                 <a:solidFill>
                   <a:srgbClr val="2563EB"/>
                 </a:solidFill>
@@ -26582,7 +26578,7 @@
               </a:rPr>
               <a:t>TiDB (建議採用)</a:t>
             </a:r>
-            <a:endParaRPr b="1" dirty="0" sz="1500">
+            <a:endParaRPr sz="1500" b="1" dirty="0">
               <a:solidFill>
                 <a:srgbClr val="2563EB"/>
               </a:solidFill>
@@ -26622,7 +26618,7 @@
           </a:ln>
         </p:spPr>
         <p:txBody>
-          <a:bodyPr anchor="t" bIns="0" lIns="0" rIns="0" tIns="0" wrap="square">
+          <a:bodyPr wrap="square" lIns="0" tIns="0" rIns="0" bIns="0" anchor="t">
             <a:normAutofit/>
           </a:bodyPr>
           <a:lstStyle/>
@@ -26632,7 +26628,7 @@
                 <a:spcPct val="105000"/>
               </a:lnSpc>
               <a:buNone/>
-              <a:defRPr b="1" sz="1275">
+              <a:defRPr sz="1275" b="1">
                 <a:solidFill>
                   <a:srgbClr val="2563EB"/>
                 </a:solidFill>
@@ -26642,7 +26638,7 @@
               </a:defRPr>
             </a:pPr>
             <a:r>
-              <a:rPr b="1" dirty="0" lang="en-US" sz="1275">
+              <a:rPr lang="en-US" sz="1275" b="1" dirty="0">
                 <a:solidFill>
                   <a:srgbClr val="2563EB"/>
                 </a:solidFill>
@@ -26653,7 +26649,7 @@
               <a:t>- </a:t>
             </a:r>
             <a:r>
-              <a:rPr b="1" dirty="0" sz="1275">
+              <a:rPr sz="1275" b="1" dirty="0">
                 <a:solidFill>
                   <a:srgbClr val="2563EB"/>
                 </a:solidFill>
@@ -26664,7 +26660,7 @@
               <a:t>MySQL｜</a:t>
             </a:r>
             <a:r>
-              <a:rPr b="1" dirty="0" lang="en" sz="1275">
+              <a:rPr lang="en" sz="1275" b="1" dirty="0">
                 <a:solidFill>
                   <a:srgbClr val="2563EB"/>
                 </a:solidFill>
@@ -26675,7 +26671,7 @@
               <a:t>p99 597 </a:t>
             </a:r>
             <a:r>
-              <a:rPr b="1" dirty="0" err="1" lang="en" sz="1275">
+              <a:rPr lang="en" sz="1275" b="1" dirty="0" err="1">
                 <a:solidFill>
                   <a:srgbClr val="2563EB"/>
                 </a:solidFill>
@@ -26686,7 +26682,7 @@
               <a:t>ms</a:t>
             </a:r>
             <a:br>
-              <a:rPr b="1" dirty="0" lang="en-US" sz="1275">
+              <a:rPr lang="en-US" sz="1275" b="1" dirty="0">
                 <a:solidFill>
                   <a:srgbClr val="2563EB"/>
                 </a:solidFill>
@@ -26696,7 +26692,7 @@
               </a:rPr>
             </a:br>
             <a:r>
-              <a:rPr b="1" dirty="0" lang="en-US" sz="1275">
+              <a:rPr lang="en-US" sz="1275" b="1" dirty="0">
                 <a:solidFill>
                   <a:srgbClr val="2563EB"/>
                 </a:solidFill>
@@ -26707,7 +26703,7 @@
               <a:t>- </a:t>
             </a:r>
             <a:r>
-              <a:rPr b="1" dirty="0" sz="1275">
+              <a:rPr sz="1275" b="1" dirty="0">
                 <a:solidFill>
                   <a:srgbClr val="2563EB"/>
                 </a:solidFill>
@@ -26724,7 +26720,7 @@
                 <a:spcPct val="105000"/>
               </a:lnSpc>
               <a:buNone/>
-              <a:defRPr b="1" sz="1275">
+              <a:defRPr sz="1275" b="1">
                 <a:solidFill>
                   <a:srgbClr val="2563EB"/>
                 </a:solidFill>
@@ -26734,7 +26730,7 @@
               </a:defRPr>
             </a:pPr>
             <a:r>
-              <a:rPr b="1" dirty="0" lang="en-US" sz="1275">
+              <a:rPr lang="en-US" sz="1275" b="1" dirty="0">
                 <a:solidFill>
                   <a:srgbClr val="2563EB"/>
                 </a:solidFill>
@@ -26745,7 +26741,7 @@
               <a:t>- </a:t>
             </a:r>
             <a:r>
-              <a:rPr b="1" dirty="0" sz="1275">
+              <a:rPr sz="1275" b="1" dirty="0">
                 <a:solidFill>
                   <a:srgbClr val="2563EB"/>
                 </a:solidFill>
@@ -26756,7 +26752,7 @@
               <a:t>P-A × A/S 12,526.5 </a:t>
             </a:r>
             <a:r>
-              <a:rPr b="1" dirty="0" err="1" sz="1275">
+              <a:rPr sz="1275" b="1" dirty="0" err="1">
                 <a:solidFill>
                   <a:srgbClr val="2563EB"/>
                 </a:solidFill>
@@ -26766,7 +26762,7 @@
               </a:rPr>
               <a:t>tpmC</a:t>
             </a:r>
-            <a:endParaRPr b="1" dirty="0" sz="1275">
+            <a:endParaRPr sz="1275" b="1" dirty="0">
               <a:solidFill>
                 <a:srgbClr val="2563EB"/>
               </a:solidFill>
@@ -26806,7 +26802,7 @@
           </a:ln>
         </p:spPr>
         <p:txBody>
-          <a:bodyPr anchor="t" bIns="0" lIns="0" rIns="0" tIns="0" wrap="square">
+          <a:bodyPr wrap="square" lIns="0" tIns="0" rIns="0" bIns="0" anchor="t">
             <a:normAutofit/>
           </a:bodyPr>
           <a:lstStyle/>
@@ -26816,7 +26812,7 @@
                 <a:spcPct val="105000"/>
               </a:lnSpc>
               <a:buNone/>
-              <a:defRPr b="0" sz="1050">
+              <a:defRPr sz="1050" b="0">
                 <a:solidFill>
                   <a:srgbClr val="667085"/>
                 </a:solidFill>
@@ -26826,7 +26822,7 @@
               </a:defRPr>
             </a:pPr>
             <a:r>
-              <a:rPr b="0" dirty="0" sz="1050">
+              <a:rPr sz="1050" b="0" dirty="0">
                 <a:solidFill>
                   <a:srgbClr val="667085"/>
                 </a:solidFill>
@@ -26836,7 +26832,7 @@
               </a:rPr>
               <a:t>MySQL 主線；A/S → A/A (RO)。目前符合 104 產品資料特性與應用場景。</a:t>
             </a:r>
-            <a:endParaRPr b="0" dirty="0" lang="en-US" sz="1050">
+            <a:endParaRPr lang="en-US" sz="1050" b="0" dirty="0">
               <a:solidFill>
                 <a:srgbClr val="667085"/>
               </a:solidFill>
@@ -26916,14 +26912,14 @@
           </a:ln>
         </p:spPr>
         <p:txBody>
-          <a:bodyPr anchor="t" bIns="0" lIns="0" rIns="0" tIns="0" wrap="square">
+          <a:bodyPr wrap="square" lIns="0" tIns="0" rIns="0" bIns="0" anchor="t">
             <a:normAutofit/>
           </a:bodyPr>
           <a:lstStyle/>
           <a:p>
             <a:pPr algn="l">
               <a:buNone/>
-              <a:defRPr b="1" sz="1500">
+              <a:defRPr sz="1500" b="1">
                 <a:solidFill>
                   <a:srgbClr val="101828"/>
                 </a:solidFill>
@@ -26933,7 +26929,7 @@
               </a:defRPr>
             </a:pPr>
             <a:r>
-              <a:rPr b="1" dirty="0" err="1" sz="1500">
+              <a:rPr sz="1500" b="1" dirty="0" err="1">
                 <a:solidFill>
                   <a:srgbClr val="101828"/>
                 </a:solidFill>
@@ -26943,7 +26939,7 @@
               </a:rPr>
               <a:t>YugabyteDB</a:t>
             </a:r>
-            <a:endParaRPr b="1" dirty="0" sz="1500">
+            <a:endParaRPr sz="1500" b="1" dirty="0">
               <a:solidFill>
                 <a:srgbClr val="101828"/>
               </a:solidFill>
@@ -26983,7 +26979,7 @@
           </a:ln>
         </p:spPr>
         <p:txBody>
-          <a:bodyPr anchor="t" bIns="0" lIns="0" rIns="0" tIns="0" wrap="square">
+          <a:bodyPr wrap="square" lIns="0" tIns="0" rIns="0" bIns="0" anchor="t">
             <a:normAutofit/>
           </a:bodyPr>
           <a:lstStyle/>
@@ -26993,7 +26989,7 @@
                 <a:spcPct val="105000"/>
               </a:lnSpc>
               <a:buNone/>
-              <a:defRPr b="0" sz="1275">
+              <a:defRPr sz="1275" b="0">
                 <a:solidFill>
                   <a:srgbClr val="101828"/>
                 </a:solidFill>
@@ -27003,7 +26999,7 @@
               </a:defRPr>
             </a:pPr>
             <a:r>
-              <a:rPr b="0" dirty="0" lang="en-US" sz="1275">
+              <a:rPr lang="en-US" sz="1275" b="0" dirty="0">
                 <a:solidFill>
                   <a:srgbClr val="101828"/>
                 </a:solidFill>
@@ -27014,7 +27010,7 @@
               <a:t>- </a:t>
             </a:r>
             <a:r>
-              <a:rPr b="0" dirty="0" sz="1275">
+              <a:rPr sz="1275" b="0" dirty="0">
                 <a:solidFill>
                   <a:srgbClr val="101828"/>
                 </a:solidFill>
@@ -27025,7 +27021,7 @@
               <a:t>PostgreSQL｜p99 216 </a:t>
             </a:r>
             <a:r>
-              <a:rPr b="0" dirty="0" err="1" sz="1275">
+              <a:rPr sz="1275" b="0" dirty="0" err="1">
                 <a:solidFill>
                   <a:srgbClr val="101828"/>
                 </a:solidFill>
@@ -27035,7 +27031,7 @@
               </a:rPr>
               <a:t>ms</a:t>
             </a:r>
-            <a:endParaRPr b="0" dirty="0" sz="1275">
+            <a:endParaRPr sz="1275" b="0" dirty="0">
               <a:solidFill>
                 <a:srgbClr val="101828"/>
               </a:solidFill>
@@ -27050,7 +27046,7 @@
                 <a:spcPct val="105000"/>
               </a:lnSpc>
               <a:buNone/>
-              <a:defRPr b="0" sz="1275">
+              <a:defRPr sz="1275" b="0">
                 <a:solidFill>
                   <a:srgbClr val="101828"/>
                 </a:solidFill>
@@ -27060,7 +27056,7 @@
               </a:defRPr>
             </a:pPr>
             <a:r>
-              <a:rPr b="0" dirty="0" lang="en-US" sz="1275">
+              <a:rPr lang="en-US" sz="1275" b="0" dirty="0">
                 <a:solidFill>
                   <a:srgbClr val="101828"/>
                 </a:solidFill>
@@ -27071,7 +27067,7 @@
               <a:t>- </a:t>
             </a:r>
             <a:r>
-              <a:rPr b="0" dirty="0" sz="1275">
+              <a:rPr sz="1275" b="0" dirty="0">
                 <a:solidFill>
                   <a:srgbClr val="101828"/>
                 </a:solidFill>
@@ -27088,7 +27084,7 @@
                 <a:spcPct val="105000"/>
               </a:lnSpc>
               <a:buNone/>
-              <a:defRPr b="0" sz="1275">
+              <a:defRPr sz="1275" b="0">
                 <a:solidFill>
                   <a:srgbClr val="101828"/>
                 </a:solidFill>
@@ -27098,7 +27094,7 @@
               </a:defRPr>
             </a:pPr>
             <a:r>
-              <a:rPr b="0" dirty="0" lang="en-US" sz="1275">
+              <a:rPr lang="en-US" sz="1275" b="0" dirty="0">
                 <a:solidFill>
                   <a:srgbClr val="101828"/>
                 </a:solidFill>
@@ -27109,7 +27105,7 @@
               <a:t>- </a:t>
             </a:r>
             <a:r>
-              <a:rPr b="0" dirty="0" sz="1275">
+              <a:rPr sz="1275" b="0" dirty="0">
                 <a:solidFill>
                   <a:srgbClr val="101828"/>
                 </a:solidFill>
@@ -27120,7 +27116,7 @@
               <a:t>P-A × A/S 12,769.5 </a:t>
             </a:r>
             <a:r>
-              <a:rPr b="0" dirty="0" err="1" sz="1275">
+              <a:rPr sz="1275" b="0" dirty="0" err="1">
                 <a:solidFill>
                   <a:srgbClr val="101828"/>
                 </a:solidFill>
@@ -27130,7 +27126,7 @@
               </a:rPr>
               <a:t>tpmC</a:t>
             </a:r>
-            <a:endParaRPr b="0" dirty="0" sz="1275">
+            <a:endParaRPr sz="1275" b="0" dirty="0">
               <a:solidFill>
                 <a:srgbClr val="101828"/>
               </a:solidFill>
@@ -27170,7 +27166,7 @@
           </a:ln>
         </p:spPr>
         <p:txBody>
-          <a:bodyPr anchor="t" bIns="0" lIns="0" rIns="0" tIns="0" wrap="square">
+          <a:bodyPr wrap="square" lIns="0" tIns="0" rIns="0" bIns="0" anchor="t">
             <a:normAutofit/>
           </a:bodyPr>
           <a:lstStyle/>
@@ -27180,7 +27176,7 @@
                 <a:spcPct val="105000"/>
               </a:lnSpc>
               <a:buNone/>
-              <a:defRPr b="0" sz="1050">
+              <a:defRPr sz="1050" b="0">
                 <a:solidFill>
                   <a:srgbClr val="667085"/>
                 </a:solidFill>
@@ -27190,7 +27186,7 @@
               </a:defRPr>
             </a:pPr>
             <a:r>
-              <a:rPr b="0" dirty="0" err="1" sz="1050">
+              <a:rPr sz="1050" b="0" dirty="0" err="1">
                 <a:solidFill>
                   <a:srgbClr val="667085"/>
                 </a:solidFill>
@@ -27200,7 +27196,7 @@
               </a:rPr>
               <a:t>跨地理區域性資料分布一致性與區域復原具優勢；現階段不適合 104 MySQL 主線應用。</a:t>
             </a:r>
-            <a:endParaRPr b="0" dirty="0" lang="en-US" sz="1050">
+            <a:endParaRPr lang="en-US" sz="1050" b="0" dirty="0">
               <a:solidFill>
                 <a:srgbClr val="667085"/>
               </a:solidFill>
@@ -27280,7 +27276,7 @@
           </a:ln>
         </p:spPr>
         <p:txBody>
-          <a:bodyPr anchor="t" bIns="0" lIns="0" rIns="0" tIns="0" wrap="square">
+          <a:bodyPr wrap="square" lIns="0" tIns="0" rIns="0" bIns="0" anchor="t">
             <a:normAutofit/>
           </a:bodyPr>
           <a:lstStyle/>
@@ -27297,7 +27293,7 @@
               </a:defRPr>
             </a:pPr>
             <a:r>
-              <a:rPr b="1" dirty="0" err="1" sz="1500">
+              <a:rPr sz="1500" b="1" dirty="0" err="1">
                 <a:solidFill>
                   <a:srgbClr val="101828"/>
                 </a:solidFill>
@@ -27307,7 +27303,7 @@
               </a:rPr>
               <a:t>CockroachDB</a:t>
             </a:r>
-            <a:endParaRPr b="1" dirty="0" sz="1500">
+            <a:endParaRPr sz="1500" b="1" dirty="0">
               <a:solidFill>
                 <a:srgbClr val="101828"/>
               </a:solidFill>
@@ -27328,7 +27324,7 @@
                 <a:cs typeface="Arial"/>
               </a:defRPr>
             </a:pPr>
-            <a:endParaRPr dirty="0" lang="en-US" sz="1250">
+            <a:endParaRPr lang="en-US" sz="1250" dirty="0">
               <a:solidFill>
                 <a:srgbClr val="101828"/>
               </a:solidFill>
@@ -27349,7 +27345,7 @@
                 <a:cs typeface="Arial"/>
               </a:defRPr>
             </a:pPr>
-            <a:endParaRPr dirty="0" lang="en-US" sz="1250">
+            <a:endParaRPr lang="en-US" sz="1250" dirty="0">
               <a:solidFill>
                 <a:srgbClr val="101828"/>
               </a:solidFill>
@@ -27389,14 +27385,14 @@
           </a:ln>
         </p:spPr>
         <p:txBody>
-          <a:bodyPr anchor="t" bIns="0" lIns="0" rIns="0" tIns="0" wrap="square">
+          <a:bodyPr wrap="square" lIns="0" tIns="0" rIns="0" bIns="0" anchor="t">
             <a:normAutofit/>
           </a:bodyPr>
           <a:lstStyle/>
           <a:p>
             <a:pPr algn="l">
               <a:buNone/>
-              <a:defRPr b="0" sz="750">
+              <a:defRPr sz="750" b="0">
                 <a:solidFill>
                   <a:srgbClr val="667085"/>
                 </a:solidFill>
@@ -27406,7 +27402,7 @@
               </a:defRPr>
             </a:pPr>
             <a:r>
-              <a:rPr b="0" sz="750">
+              <a:rPr sz="750" b="0">
                 <a:solidFill>
                   <a:srgbClr val="667085"/>
                 </a:solidFill>
@@ -27448,7 +27444,7 @@
           </a:ln>
         </p:spPr>
         <p:txBody>
-          <a:bodyPr anchor="t" bIns="0" lIns="0" rIns="0" tIns="0" wrap="square">
+          <a:bodyPr wrap="square" lIns="0" tIns="0" rIns="0" bIns="0" anchor="t">
             <a:normAutofit/>
           </a:bodyPr>
           <a:lstStyle/>
@@ -27458,7 +27454,7 @@
                 <a:spcPct val="105000"/>
               </a:lnSpc>
               <a:buNone/>
-              <a:defRPr b="0" sz="1275">
+              <a:defRPr sz="1275" b="0">
                 <a:solidFill>
                   <a:srgbClr val="101828"/>
                 </a:solidFill>
@@ -27468,7 +27464,7 @@
               </a:defRPr>
             </a:pPr>
             <a:r>
-              <a:rPr b="0" dirty="0" lang="en-US" sz="1275">
+              <a:rPr lang="en-US" sz="1275" b="0" dirty="0">
                 <a:solidFill>
                   <a:srgbClr val="101828"/>
                 </a:solidFill>
@@ -27479,7 +27475,7 @@
               <a:t>- PostgreSQL｜p99 440 </a:t>
             </a:r>
             <a:r>
-              <a:rPr b="0" dirty="0" err="1" lang="en-US" sz="1275">
+              <a:rPr lang="en-US" sz="1275" b="0" dirty="0" err="1">
                 <a:solidFill>
                   <a:srgbClr val="101828"/>
                 </a:solidFill>
@@ -27489,7 +27485,7 @@
               </a:rPr>
               <a:t>ms</a:t>
             </a:r>
-            <a:endParaRPr b="0" dirty="0" lang="en-US" sz="1275">
+            <a:endParaRPr lang="en-US" sz="1275" b="0" dirty="0">
               <a:solidFill>
                 <a:srgbClr val="101828"/>
               </a:solidFill>
@@ -27504,7 +27500,7 @@
                 <a:spcPct val="105000"/>
               </a:lnSpc>
               <a:buNone/>
-              <a:defRPr b="0" sz="1275">
+              <a:defRPr sz="1275" b="0">
                 <a:solidFill>
                   <a:srgbClr val="101828"/>
                 </a:solidFill>
@@ -27514,7 +27510,7 @@
               </a:defRPr>
             </a:pPr>
             <a:r>
-              <a:rPr b="0" dirty="0" lang="en-US" sz="1275">
+              <a:rPr lang="en-US" sz="1275" b="0" dirty="0">
                 <a:solidFill>
                   <a:srgbClr val="101828"/>
                 </a:solidFill>
@@ -27531,7 +27527,7 @@
                 <a:spcPct val="105000"/>
               </a:lnSpc>
               <a:buNone/>
-              <a:defRPr b="0" sz="1275">
+              <a:defRPr sz="1275" b="0">
                 <a:solidFill>
                   <a:srgbClr val="101828"/>
                 </a:solidFill>
@@ -27541,7 +27537,7 @@
               </a:defRPr>
             </a:pPr>
             <a:r>
-              <a:rPr b="0" dirty="0" lang="en-US" sz="1275">
+              <a:rPr lang="en-US" sz="1275" b="0" dirty="0">
                 <a:solidFill>
                   <a:srgbClr val="101828"/>
                 </a:solidFill>
@@ -27552,7 +27548,7 @@
               <a:t>- P-A × A/S 10,163.4 </a:t>
             </a:r>
             <a:r>
-              <a:rPr b="0" dirty="0" err="1" lang="en-US" sz="1275">
+              <a:rPr lang="en-US" sz="1275" b="0" dirty="0" err="1">
                 <a:solidFill>
                   <a:srgbClr val="101828"/>
                 </a:solidFill>
@@ -27562,7 +27558,7 @@
               </a:rPr>
               <a:t>tpmC</a:t>
             </a:r>
-            <a:endParaRPr b="0" dirty="0" lang="en-US" sz="1275">
+            <a:endParaRPr lang="en-US" sz="1275" b="0" dirty="0">
               <a:solidFill>
                 <a:srgbClr val="101828"/>
               </a:solidFill>
@@ -27602,7 +27598,7 @@
           </a:ln>
         </p:spPr>
         <p:txBody>
-          <a:bodyPr anchor="t" bIns="0" lIns="0" rIns="0" tIns="0" wrap="square">
+          <a:bodyPr wrap="square" lIns="0" tIns="0" rIns="0" bIns="0" anchor="t">
             <a:normAutofit/>
           </a:bodyPr>
           <a:lstStyle/>
@@ -27611,7 +27607,7 @@
               <a:lnSpc>
                 <a:spcPct val="105000"/>
               </a:lnSpc>
-              <a:defRPr b="0" sz="1050">
+              <a:defRPr sz="1050" b="0">
                 <a:solidFill>
                   <a:srgbClr val="667085"/>
                 </a:solidFill>
@@ -27621,7 +27617,7 @@
               </a:defRPr>
             </a:pPr>
             <a:r>
-              <a:rPr altLang="en-US" dirty="0" lang="zh-TW" sz="1050">
+              <a:rPr lang="zh-TW" altLang="en-US" sz="1050" dirty="0">
                 <a:solidFill>
                   <a:srgbClr val="667085"/>
                 </a:solidFill>
@@ -29899,7 +29895,7 @@
 </file>
 
 <file path=ppt/slides/slide8.xml><?xml version="1.0" encoding="utf-8"?>
-<p:sld xmlns:a="http://schemas.openxmlformats.org/drawingml/2006/main" xmlns:p="http://schemas.openxmlformats.org/presentationml/2006/main" xmlns:r="http://schemas.openxmlformats.org/officeDocument/2006/relationships">
+<p:sld xmlns:a="http://schemas.openxmlformats.org/drawingml/2006/main" xmlns:r="http://schemas.openxmlformats.org/officeDocument/2006/relationships" xmlns:p="http://schemas.openxmlformats.org/presentationml/2006/main">
   <p:cSld>
     <p:bg>
       <p:bgPr>
@@ -29952,14 +29948,14 @@
           </a:ln>
         </p:spPr>
         <p:txBody>
-          <a:bodyPr anchor="t" bIns="0" lIns="0" rIns="0" tIns="0" wrap="square">
+          <a:bodyPr wrap="square" lIns="0" tIns="0" rIns="0" bIns="0" anchor="t">
             <a:normAutofit/>
           </a:bodyPr>
           <a:lstStyle/>
           <a:p>
             <a:pPr algn="l">
               <a:buNone/>
-              <a:defRPr b="1" sz="975">
+              <a:defRPr sz="975" b="1">
                 <a:solidFill>
                   <a:srgbClr val="2563EB"/>
                 </a:solidFill>
@@ -29969,7 +29965,7 @@
               </a:defRPr>
             </a:pPr>
             <a:r>
-              <a:rPr b="1" sz="975">
+              <a:rPr sz="975" b="1">
                 <a:solidFill>
                   <a:srgbClr val="2563EB"/>
                 </a:solidFill>
@@ -30011,14 +30007,14 @@
           </a:ln>
         </p:spPr>
         <p:txBody>
-          <a:bodyPr anchor="ctr" bIns="0" lIns="0" rIns="0" tIns="0" wrap="square">
+          <a:bodyPr wrap="square" lIns="0" tIns="0" rIns="0" bIns="0" anchor="ctr">
             <a:normAutofit/>
           </a:bodyPr>
           <a:lstStyle/>
           <a:p>
             <a:pPr algn="l">
               <a:buNone/>
-              <a:defRPr b="1" sz="3000">
+              <a:defRPr sz="3000" b="1">
                 <a:solidFill>
                   <a:srgbClr val="111827"/>
                 </a:solidFill>
@@ -30028,7 +30024,7 @@
               </a:defRPr>
             </a:pPr>
             <a:r>
-              <a:rPr b="1" sz="3000">
+              <a:rPr sz="3000" b="1">
                 <a:solidFill>
                   <a:srgbClr val="111827"/>
                 </a:solidFill>
@@ -30092,14 +30088,14 @@
           </a:ln>
         </p:spPr>
         <p:txBody>
-          <a:bodyPr anchor="t" bIns="0" lIns="0" rIns="0" tIns="0" wrap="square">
+          <a:bodyPr wrap="square" lIns="0" tIns="0" rIns="0" bIns="0" anchor="t">
             <a:normAutofit/>
           </a:bodyPr>
           <a:lstStyle/>
           <a:p>
             <a:pPr algn="r">
               <a:buNone/>
-              <a:defRPr b="0" sz="900">
+              <a:defRPr sz="900" b="0">
                 <a:solidFill>
                   <a:srgbClr val="667085"/>
                 </a:solidFill>
@@ -30109,7 +30105,7 @@
               </a:defRPr>
             </a:pPr>
             <a:r>
-              <a:rPr b="0" sz="900">
+              <a:rPr sz="900" b="0">
                 <a:solidFill>
                   <a:srgbClr val="667085"/>
                 </a:solidFill>
@@ -30151,14 +30147,14 @@
           </a:ln>
         </p:spPr>
         <p:txBody>
-          <a:bodyPr anchor="t" bIns="0" lIns="0" rIns="0" tIns="0" wrap="square">
+          <a:bodyPr wrap="square" lIns="0" tIns="0" rIns="0" bIns="0" anchor="t">
             <a:normAutofit/>
           </a:bodyPr>
           <a:lstStyle/>
           <a:p>
             <a:pPr algn="l">
               <a:buNone/>
-              <a:defRPr b="0" sz="1275">
+              <a:defRPr sz="1275" b="0">
                 <a:solidFill>
                   <a:srgbClr val="667085"/>
                 </a:solidFill>
@@ -30168,7 +30164,7 @@
               </a:defRPr>
             </a:pPr>
             <a:r>
-              <a:rPr b="0" sz="1275">
+              <a:rPr sz="1275" b="0">
                 <a:solidFill>
                   <a:srgbClr val="667085"/>
                 </a:solidFill>
@@ -30248,14 +30244,14 @@
           </a:ln>
         </p:spPr>
         <p:txBody>
-          <a:bodyPr anchor="t" bIns="0" lIns="0" rIns="0" tIns="0" wrap="square">
+          <a:bodyPr wrap="square" lIns="0" tIns="0" rIns="0" bIns="0" anchor="t">
             <a:normAutofit/>
           </a:bodyPr>
           <a:lstStyle/>
           <a:p>
             <a:pPr algn="l">
               <a:buNone/>
-              <a:defRPr b="1" sz="1125">
+              <a:defRPr sz="1125" b="1">
                 <a:solidFill>
                   <a:srgbClr val="FFFFFF"/>
                 </a:solidFill>
@@ -30265,7 +30261,7 @@
               </a:defRPr>
             </a:pPr>
             <a:r>
-              <a:rPr b="1" sz="1125">
+              <a:rPr sz="1125" b="1">
                 <a:solidFill>
                   <a:srgbClr val="FFFFFF"/>
                 </a:solidFill>
@@ -30345,14 +30341,14 @@
           </a:ln>
         </p:spPr>
         <p:txBody>
-          <a:bodyPr anchor="t" bIns="0" lIns="0" rIns="0" tIns="0" wrap="square">
+          <a:bodyPr wrap="square" lIns="0" tIns="0" rIns="0" bIns="0" anchor="t">
             <a:normAutofit/>
           </a:bodyPr>
           <a:lstStyle/>
           <a:p>
             <a:pPr algn="ctr">
               <a:buNone/>
-              <a:defRPr b="1" sz="1125">
+              <a:defRPr sz="1125" b="1">
                 <a:solidFill>
                   <a:srgbClr val="FFFFFF"/>
                 </a:solidFill>
@@ -30362,7 +30358,7 @@
               </a:defRPr>
             </a:pPr>
             <a:r>
-              <a:rPr b="1" sz="1125">
+              <a:rPr sz="1125" b="1">
                 <a:solidFill>
                   <a:srgbClr val="FFFFFF"/>
                 </a:solidFill>
@@ -30442,14 +30438,14 @@
           </a:ln>
         </p:spPr>
         <p:txBody>
-          <a:bodyPr anchor="t" bIns="0" lIns="0" rIns="0" tIns="0" wrap="square">
+          <a:bodyPr wrap="square" lIns="0" tIns="0" rIns="0" bIns="0" anchor="t">
             <a:normAutofit/>
           </a:bodyPr>
           <a:lstStyle/>
           <a:p>
             <a:pPr algn="ctr">
               <a:buNone/>
-              <a:defRPr b="1" sz="1125">
+              <a:defRPr sz="1125" b="1">
                 <a:solidFill>
                   <a:srgbClr val="FFFFFF"/>
                 </a:solidFill>
@@ -30459,7 +30455,7 @@
               </a:defRPr>
             </a:pPr>
             <a:r>
-              <a:rPr b="1" sz="1125">
+              <a:rPr sz="1125" b="1">
                 <a:solidFill>
                   <a:srgbClr val="FFFFFF"/>
                 </a:solidFill>
@@ -30539,14 +30535,14 @@
           </a:ln>
         </p:spPr>
         <p:txBody>
-          <a:bodyPr anchor="t" bIns="0" lIns="0" rIns="0" tIns="0" wrap="square">
+          <a:bodyPr wrap="square" lIns="0" tIns="0" rIns="0" bIns="0" anchor="t">
             <a:normAutofit/>
           </a:bodyPr>
           <a:lstStyle/>
           <a:p>
             <a:pPr algn="ctr">
               <a:buNone/>
-              <a:defRPr b="1" sz="1125">
+              <a:defRPr sz="1125" b="1">
                 <a:solidFill>
                   <a:srgbClr val="FFFFFF"/>
                 </a:solidFill>
@@ -30556,7 +30552,7 @@
               </a:defRPr>
             </a:pPr>
             <a:r>
-              <a:rPr b="1" sz="1125">
+              <a:rPr sz="1125" b="1">
                 <a:solidFill>
                   <a:srgbClr val="FFFFFF"/>
                 </a:solidFill>
@@ -30636,14 +30632,14 @@
           </a:ln>
         </p:spPr>
         <p:txBody>
-          <a:bodyPr anchor="t" bIns="0" lIns="0" rIns="0" tIns="0" wrap="square">
+          <a:bodyPr wrap="square" lIns="0" tIns="0" rIns="0" bIns="0" anchor="t">
             <a:normAutofit/>
           </a:bodyPr>
           <a:lstStyle/>
           <a:p>
             <a:pPr algn="ctr">
               <a:buNone/>
-              <a:defRPr b="1" sz="1125">
+              <a:defRPr sz="1125" b="1">
                 <a:solidFill>
                   <a:srgbClr val="FFFFFF"/>
                 </a:solidFill>
@@ -30653,7 +30649,7 @@
               </a:defRPr>
             </a:pPr>
             <a:r>
-              <a:rPr b="1" sz="1125">
+              <a:rPr sz="1125" b="1">
                 <a:solidFill>
                   <a:srgbClr val="FFFFFF"/>
                 </a:solidFill>
@@ -30735,14 +30731,14 @@
           </a:ln>
         </p:spPr>
         <p:txBody>
-          <a:bodyPr anchor="ctr" bIns="0" lIns="0" rIns="0" tIns="0" wrap="square">
+          <a:bodyPr wrap="square" lIns="0" tIns="0" rIns="0" bIns="0" anchor="ctr">
             <a:normAutofit/>
           </a:bodyPr>
           <a:lstStyle/>
           <a:p>
             <a:pPr algn="l">
               <a:buNone/>
-              <a:defRPr b="1" sz="1200">
+              <a:defRPr sz="1200" b="1">
                 <a:solidFill>
                   <a:srgbClr val="111827"/>
                 </a:solidFill>
@@ -30752,7 +30748,7 @@
               </a:defRPr>
             </a:pPr>
             <a:r>
-              <a:rPr b="1" sz="1200">
+              <a:rPr sz="1200" b="1">
                 <a:solidFill>
                   <a:srgbClr val="111827"/>
                 </a:solidFill>
@@ -30834,14 +30830,14 @@
           </a:ln>
         </p:spPr>
         <p:txBody>
-          <a:bodyPr anchor="ctr" bIns="0" lIns="0" rIns="0" tIns="0" wrap="square">
+          <a:bodyPr wrap="square" lIns="0" tIns="0" rIns="0" bIns="0" anchor="ctr">
             <a:normAutofit/>
           </a:bodyPr>
           <a:lstStyle/>
           <a:p>
             <a:pPr algn="ctr">
               <a:buNone/>
-              <a:defRPr b="0" sz="1200">
+              <a:defRPr sz="1200" b="0">
                 <a:solidFill>
                   <a:srgbClr val="111827"/>
                 </a:solidFill>
@@ -30851,7 +30847,7 @@
               </a:defRPr>
             </a:pPr>
             <a:r>
-              <a:rPr b="0" sz="1200">
+              <a:rPr sz="1200" b="0">
                 <a:solidFill>
                   <a:srgbClr val="111827"/>
                 </a:solidFill>
@@ -30933,14 +30929,14 @@
           </a:ln>
         </p:spPr>
         <p:txBody>
-          <a:bodyPr anchor="ctr" bIns="0" lIns="0" rIns="0" tIns="0" wrap="square">
+          <a:bodyPr wrap="square" lIns="0" tIns="0" rIns="0" bIns="0" anchor="ctr">
             <a:normAutofit/>
           </a:bodyPr>
           <a:lstStyle/>
           <a:p>
             <a:pPr algn="ctr">
               <a:buNone/>
-              <a:defRPr b="0" sz="1200">
+              <a:defRPr sz="1200" b="0">
                 <a:solidFill>
                   <a:srgbClr val="111827"/>
                 </a:solidFill>
@@ -30950,7 +30946,7 @@
               </a:defRPr>
             </a:pPr>
             <a:r>
-              <a:rPr b="0" sz="1200">
+              <a:rPr sz="1200" b="0">
                 <a:solidFill>
                   <a:srgbClr val="111827"/>
                 </a:solidFill>
@@ -31032,14 +31028,14 @@
           </a:ln>
         </p:spPr>
         <p:txBody>
-          <a:bodyPr anchor="ctr" bIns="0" lIns="0" rIns="0" tIns="0" wrap="square">
+          <a:bodyPr wrap="square" lIns="0" tIns="0" rIns="0" bIns="0" anchor="ctr">
             <a:normAutofit/>
           </a:bodyPr>
           <a:lstStyle/>
           <a:p>
             <a:pPr algn="ctr">
               <a:buNone/>
-              <a:defRPr b="0" sz="1200">
+              <a:defRPr sz="1200" b="0">
                 <a:solidFill>
                   <a:srgbClr val="C2413A"/>
                 </a:solidFill>
@@ -31049,7 +31045,7 @@
               </a:defRPr>
             </a:pPr>
             <a:r>
-              <a:rPr b="0" sz="1200">
+              <a:rPr sz="1200" b="0">
                 <a:solidFill>
                   <a:srgbClr val="C2413A"/>
                 </a:solidFill>
@@ -31131,14 +31127,14 @@
           </a:ln>
         </p:spPr>
         <p:txBody>
-          <a:bodyPr anchor="ctr" bIns="0" lIns="0" rIns="0" tIns="0" wrap="square">
+          <a:bodyPr wrap="square" lIns="0" tIns="0" rIns="0" bIns="0" anchor="ctr">
             <a:normAutofit/>
           </a:bodyPr>
           <a:lstStyle/>
           <a:p>
             <a:pPr algn="ctr">
               <a:buNone/>
-              <a:defRPr b="1" sz="1200">
+              <a:defRPr sz="1200" b="1">
                 <a:solidFill>
                   <a:srgbClr val="111827"/>
                 </a:solidFill>
@@ -31148,7 +31144,7 @@
               </a:defRPr>
             </a:pPr>
             <a:r>
-              <a:rPr b="1" sz="1200">
+              <a:rPr sz="1200" b="1">
                 <a:solidFill>
                   <a:srgbClr val="111827"/>
                 </a:solidFill>
@@ -31230,14 +31226,14 @@
           </a:ln>
         </p:spPr>
         <p:txBody>
-          <a:bodyPr anchor="ctr" bIns="0" lIns="0" rIns="0" tIns="0" wrap="square">
+          <a:bodyPr wrap="square" lIns="0" tIns="0" rIns="0" bIns="0" anchor="ctr">
             <a:normAutofit/>
           </a:bodyPr>
           <a:lstStyle/>
           <a:p>
             <a:pPr algn="l">
               <a:buNone/>
-              <a:defRPr b="1" sz="1200">
+              <a:defRPr sz="1200" b="1">
                 <a:solidFill>
                   <a:srgbClr val="2563EB"/>
                 </a:solidFill>
@@ -31247,7 +31243,7 @@
               </a:defRPr>
             </a:pPr>
             <a:r>
-              <a:rPr b="1" sz="1200">
+              <a:rPr sz="1200" b="1">
                 <a:solidFill>
                   <a:srgbClr val="2563EB"/>
                 </a:solidFill>
@@ -31329,14 +31325,14 @@
           </a:ln>
         </p:spPr>
         <p:txBody>
-          <a:bodyPr anchor="ctr" bIns="0" lIns="0" rIns="0" tIns="0" wrap="square">
+          <a:bodyPr wrap="square" lIns="0" tIns="0" rIns="0" bIns="0" anchor="ctr">
             <a:normAutofit/>
           </a:bodyPr>
           <a:lstStyle/>
           <a:p>
             <a:pPr algn="ctr">
               <a:buNone/>
-              <a:defRPr b="1" sz="1200">
+              <a:defRPr sz="1200" b="1">
                 <a:solidFill>
                   <a:srgbClr val="2563EB"/>
                 </a:solidFill>
@@ -31346,7 +31342,7 @@
               </a:defRPr>
             </a:pPr>
             <a:r>
-              <a:rPr b="1" sz="1200">
+              <a:rPr sz="1200" b="1">
                 <a:solidFill>
                   <a:srgbClr val="2563EB"/>
                 </a:solidFill>
@@ -31428,14 +31424,14 @@
           </a:ln>
         </p:spPr>
         <p:txBody>
-          <a:bodyPr anchor="ctr" bIns="0" lIns="0" rIns="0" tIns="0" wrap="square">
+          <a:bodyPr wrap="square" lIns="0" tIns="0" rIns="0" bIns="0" anchor="ctr">
             <a:normAutofit/>
           </a:bodyPr>
           <a:lstStyle/>
           <a:p>
             <a:pPr algn="ctr">
               <a:buNone/>
-              <a:defRPr b="1" sz="1200">
+              <a:defRPr sz="1200" b="1">
                 <a:solidFill>
                   <a:srgbClr val="2563EB"/>
                 </a:solidFill>
@@ -31445,7 +31441,7 @@
               </a:defRPr>
             </a:pPr>
             <a:r>
-              <a:rPr b="1" sz="1200">
+              <a:rPr sz="1200" b="1">
                 <a:solidFill>
                   <a:srgbClr val="2563EB"/>
                 </a:solidFill>
@@ -31527,14 +31523,14 @@
           </a:ln>
         </p:spPr>
         <p:txBody>
-          <a:bodyPr anchor="ctr" bIns="0" lIns="0" rIns="0" tIns="0" wrap="square">
+          <a:bodyPr wrap="square" lIns="0" tIns="0" rIns="0" bIns="0" anchor="ctr">
             <a:normAutofit/>
           </a:bodyPr>
           <a:lstStyle/>
           <a:p>
             <a:pPr algn="ctr">
               <a:buNone/>
-              <a:defRPr b="1" sz="1200">
+              <a:defRPr sz="1200" b="1">
                 <a:solidFill>
                   <a:srgbClr val="2563EB"/>
                 </a:solidFill>
@@ -31544,7 +31540,7 @@
               </a:defRPr>
             </a:pPr>
             <a:r>
-              <a:rPr b="1" sz="1200">
+              <a:rPr sz="1200" b="1">
                 <a:solidFill>
                   <a:srgbClr val="2563EB"/>
                 </a:solidFill>
@@ -31626,14 +31622,14 @@
           </a:ln>
         </p:spPr>
         <p:txBody>
-          <a:bodyPr anchor="ctr" bIns="0" lIns="0" rIns="0" tIns="0" wrap="square">
+          <a:bodyPr wrap="square" lIns="0" tIns="0" rIns="0" bIns="0" anchor="ctr">
             <a:normAutofit/>
           </a:bodyPr>
           <a:lstStyle/>
           <a:p>
             <a:pPr algn="ctr">
               <a:buNone/>
-              <a:defRPr b="1" sz="1200">
+              <a:defRPr sz="1200" b="1">
                 <a:solidFill>
                   <a:srgbClr val="2563EB"/>
                 </a:solidFill>
@@ -31643,7 +31639,7 @@
               </a:defRPr>
             </a:pPr>
             <a:r>
-              <a:rPr b="1" sz="1200">
+              <a:rPr sz="1200" b="1">
                 <a:solidFill>
                   <a:srgbClr val="2563EB"/>
                 </a:solidFill>
@@ -31725,14 +31721,14 @@
           </a:ln>
         </p:spPr>
         <p:txBody>
-          <a:bodyPr anchor="ctr" bIns="0" lIns="0" rIns="0" tIns="0" wrap="square">
+          <a:bodyPr wrap="square" lIns="0" tIns="0" rIns="0" bIns="0" anchor="ctr">
             <a:normAutofit/>
           </a:bodyPr>
           <a:lstStyle/>
           <a:p>
             <a:pPr algn="l">
               <a:buNone/>
-              <a:defRPr b="1" sz="1200">
+              <a:defRPr sz="1200" b="1">
                 <a:solidFill>
                   <a:srgbClr val="111827"/>
                 </a:solidFill>
@@ -31742,7 +31738,7 @@
               </a:defRPr>
             </a:pPr>
             <a:r>
-              <a:rPr b="1" sz="1200">
+              <a:rPr sz="1200" b="1">
                 <a:solidFill>
                   <a:srgbClr val="111827"/>
                 </a:solidFill>
@@ -31824,14 +31820,14 @@
           </a:ln>
         </p:spPr>
         <p:txBody>
-          <a:bodyPr anchor="ctr" bIns="0" lIns="0" rIns="0" tIns="0" wrap="square">
+          <a:bodyPr wrap="square" lIns="0" tIns="0" rIns="0" bIns="0" anchor="ctr">
             <a:normAutofit/>
           </a:bodyPr>
           <a:lstStyle/>
           <a:p>
             <a:pPr algn="ctr">
               <a:buNone/>
-              <a:defRPr b="0" sz="1200">
+              <a:defRPr sz="1200" b="0">
                 <a:solidFill>
                   <a:srgbClr val="111827"/>
                 </a:solidFill>
@@ -31841,7 +31837,7 @@
               </a:defRPr>
             </a:pPr>
             <a:r>
-              <a:rPr b="0" sz="1200">
+              <a:rPr sz="1200" b="0">
                 <a:solidFill>
                   <a:srgbClr val="111827"/>
                 </a:solidFill>
@@ -31923,14 +31919,14 @@
           </a:ln>
         </p:spPr>
         <p:txBody>
-          <a:bodyPr anchor="ctr" bIns="0" lIns="0" rIns="0" tIns="0" wrap="square">
+          <a:bodyPr wrap="square" lIns="0" tIns="0" rIns="0" bIns="0" anchor="ctr">
             <a:normAutofit/>
           </a:bodyPr>
           <a:lstStyle/>
           <a:p>
             <a:pPr algn="ctr">
               <a:buNone/>
-              <a:defRPr b="0" sz="1200">
+              <a:defRPr sz="1200" b="0">
                 <a:solidFill>
                   <a:srgbClr val="111827"/>
                 </a:solidFill>
@@ -31940,7 +31936,7 @@
               </a:defRPr>
             </a:pPr>
             <a:r>
-              <a:rPr b="0" sz="1200">
+              <a:rPr sz="1200" b="0">
                 <a:solidFill>
                   <a:srgbClr val="111827"/>
                 </a:solidFill>
@@ -32022,14 +32018,14 @@
           </a:ln>
         </p:spPr>
         <p:txBody>
-          <a:bodyPr anchor="ctr" bIns="0" lIns="0" rIns="0" tIns="0" wrap="square">
+          <a:bodyPr wrap="square" lIns="0" tIns="0" rIns="0" bIns="0" anchor="ctr">
             <a:normAutofit/>
           </a:bodyPr>
           <a:lstStyle/>
           <a:p>
             <a:pPr algn="ctr">
               <a:buNone/>
-              <a:defRPr b="0" sz="1200">
+              <a:defRPr sz="1200" b="0">
                 <a:solidFill>
                   <a:srgbClr val="16803C"/>
                 </a:solidFill>
@@ -32039,7 +32035,7 @@
               </a:defRPr>
             </a:pPr>
             <a:r>
-              <a:rPr b="0" sz="1200">
+              <a:rPr sz="1200" b="0">
                 <a:solidFill>
                   <a:srgbClr val="16803C"/>
                 </a:solidFill>
@@ -32121,14 +32117,14 @@
           </a:ln>
         </p:spPr>
         <p:txBody>
-          <a:bodyPr anchor="ctr" bIns="0" lIns="0" rIns="0" tIns="0" wrap="square">
+          <a:bodyPr wrap="square" lIns="0" tIns="0" rIns="0" bIns="0" anchor="ctr">
             <a:normAutofit/>
           </a:bodyPr>
           <a:lstStyle/>
           <a:p>
             <a:pPr algn="ctr">
               <a:buNone/>
-              <a:defRPr b="1" sz="1200">
+              <a:defRPr sz="1200" b="1">
                 <a:solidFill>
                   <a:srgbClr val="111827"/>
                 </a:solidFill>
@@ -32138,7 +32134,7 @@
               </a:defRPr>
             </a:pPr>
             <a:r>
-              <a:rPr b="1" sz="1200">
+              <a:rPr sz="1200" b="1">
                 <a:solidFill>
                   <a:srgbClr val="111827"/>
                 </a:solidFill>
@@ -32220,14 +32216,14 @@
           </a:ln>
         </p:spPr>
         <p:txBody>
-          <a:bodyPr anchor="ctr" bIns="0" lIns="0" rIns="0" tIns="0" wrap="square">
+          <a:bodyPr wrap="square" lIns="0" tIns="0" rIns="0" bIns="0" anchor="ctr">
             <a:normAutofit/>
           </a:bodyPr>
           <a:lstStyle/>
           <a:p>
             <a:pPr algn="l">
               <a:buNone/>
-              <a:defRPr b="1" sz="1200">
+              <a:defRPr sz="1200" b="1">
                 <a:solidFill>
                   <a:srgbClr val="111827"/>
                 </a:solidFill>
@@ -32237,7 +32233,7 @@
               </a:defRPr>
             </a:pPr>
             <a:r>
-              <a:rPr b="1" sz="1200">
+              <a:rPr sz="1200" b="1">
                 <a:solidFill>
                   <a:srgbClr val="111827"/>
                 </a:solidFill>
@@ -32319,14 +32315,14 @@
           </a:ln>
         </p:spPr>
         <p:txBody>
-          <a:bodyPr anchor="ctr" bIns="0" lIns="0" rIns="0" tIns="0" wrap="square">
+          <a:bodyPr wrap="square" lIns="0" tIns="0" rIns="0" bIns="0" anchor="ctr">
             <a:normAutofit/>
           </a:bodyPr>
           <a:lstStyle/>
           <a:p>
             <a:pPr algn="ctr">
               <a:buNone/>
-              <a:defRPr b="0" sz="1200">
+              <a:defRPr sz="1200" b="0">
                 <a:solidFill>
                   <a:srgbClr val="111827"/>
                 </a:solidFill>
@@ -32336,7 +32332,7 @@
               </a:defRPr>
             </a:pPr>
             <a:r>
-              <a:rPr b="0" sz="1200">
+              <a:rPr sz="1200" b="0">
                 <a:solidFill>
                   <a:srgbClr val="111827"/>
                 </a:solidFill>
@@ -32418,14 +32414,14 @@
           </a:ln>
         </p:spPr>
         <p:txBody>
-          <a:bodyPr anchor="ctr" bIns="0" lIns="0" rIns="0" tIns="0" wrap="square">
+          <a:bodyPr wrap="square" lIns="0" tIns="0" rIns="0" bIns="0" anchor="ctr">
             <a:normAutofit/>
           </a:bodyPr>
           <a:lstStyle/>
           <a:p>
             <a:pPr algn="ctr">
               <a:buNone/>
-              <a:defRPr b="0" sz="1200">
+              <a:defRPr sz="1200" b="0">
                 <a:solidFill>
                   <a:srgbClr val="111827"/>
                 </a:solidFill>
@@ -32435,7 +32431,7 @@
               </a:defRPr>
             </a:pPr>
             <a:r>
-              <a:rPr b="0" sz="1200">
+              <a:rPr sz="1200" b="0">
                 <a:solidFill>
                   <a:srgbClr val="111827"/>
                 </a:solidFill>
@@ -32517,14 +32513,14 @@
           </a:ln>
         </p:spPr>
         <p:txBody>
-          <a:bodyPr anchor="ctr" bIns="0" lIns="0" rIns="0" tIns="0" wrap="square">
+          <a:bodyPr wrap="square" lIns="0" tIns="0" rIns="0" bIns="0" anchor="ctr">
             <a:normAutofit/>
           </a:bodyPr>
           <a:lstStyle/>
           <a:p>
             <a:pPr algn="ctr">
               <a:buNone/>
-              <a:defRPr b="0" sz="1200">
+              <a:defRPr sz="1200" b="0">
                 <a:solidFill>
                   <a:srgbClr val="16803C"/>
                 </a:solidFill>
@@ -32534,7 +32530,7 @@
               </a:defRPr>
             </a:pPr>
             <a:r>
-              <a:rPr b="0" sz="1200">
+              <a:rPr sz="1200" b="0">
                 <a:solidFill>
                   <a:srgbClr val="16803C"/>
                 </a:solidFill>
@@ -32616,14 +32612,14 @@
           </a:ln>
         </p:spPr>
         <p:txBody>
-          <a:bodyPr anchor="ctr" bIns="0" lIns="0" rIns="0" tIns="0" wrap="square">
+          <a:bodyPr wrap="square" lIns="0" tIns="0" rIns="0" bIns="0" anchor="ctr">
             <a:normAutofit/>
           </a:bodyPr>
           <a:lstStyle/>
           <a:p>
             <a:pPr algn="ctr">
               <a:buNone/>
-              <a:defRPr b="1" sz="1200">
+              <a:defRPr sz="1200" b="1">
                 <a:solidFill>
                   <a:srgbClr val="111827"/>
                 </a:solidFill>
@@ -32633,7 +32629,7 @@
               </a:defRPr>
             </a:pPr>
             <a:r>
-              <a:rPr b="1" sz="1200">
+              <a:rPr sz="1200" b="1">
                 <a:solidFill>
                   <a:srgbClr val="111827"/>
                 </a:solidFill>
@@ -32713,14 +32709,14 @@
           </a:ln>
         </p:spPr>
         <p:txBody>
-          <a:bodyPr anchor="t" bIns="0" lIns="0" rIns="0" tIns="0" wrap="square">
+          <a:bodyPr wrap="square" lIns="0" tIns="0" rIns="0" bIns="0" anchor="t">
             <a:normAutofit/>
           </a:bodyPr>
           <a:lstStyle/>
           <a:p>
             <a:pPr algn="l">
               <a:buNone/>
-              <a:defRPr b="1" sz="1425">
+              <a:defRPr sz="1425" b="1">
                 <a:solidFill>
                   <a:srgbClr val="2563EB"/>
                 </a:solidFill>
@@ -32730,7 +32726,7 @@
               </a:defRPr>
             </a:pPr>
             <a:r>
-              <a:rPr b="1" dirty="0" err="1" sz="1425">
+              <a:rPr sz="1425" b="1" dirty="0" err="1">
                 <a:solidFill>
                   <a:srgbClr val="2563EB"/>
                 </a:solidFill>
@@ -32744,7 +32740,7 @@
           <a:p>
             <a:pPr algn="l">
               <a:buNone/>
-              <a:defRPr b="1" sz="1425">
+              <a:defRPr sz="1425" b="1">
                 <a:solidFill>
                   <a:srgbClr val="2563EB"/>
                 </a:solidFill>
@@ -32754,7 +32750,7 @@
               </a:defRPr>
             </a:pPr>
             <a:r>
-              <a:rPr b="1" dirty="0" err="1" sz="1425">
+              <a:rPr sz="1425" b="1" dirty="0" err="1">
                 <a:solidFill>
                   <a:srgbClr val="101828"/>
                 </a:solidFill>
@@ -32796,14 +32792,14 @@
           </a:ln>
         </p:spPr>
         <p:txBody>
-          <a:bodyPr anchor="t" bIns="0" lIns="0" rIns="0" tIns="0" wrap="square">
+          <a:bodyPr wrap="square" lIns="0" tIns="0" rIns="0" bIns="0" anchor="t">
             <a:normAutofit/>
           </a:bodyPr>
           <a:lstStyle/>
           <a:p>
             <a:pPr algn="l">
               <a:buNone/>
-              <a:defRPr b="0" sz="750">
+              <a:defRPr sz="750" b="0">
                 <a:solidFill>
                   <a:srgbClr val="667085"/>
                 </a:solidFill>
@@ -32813,7 +32809,7 @@
               </a:defRPr>
             </a:pPr>
             <a:r>
-              <a:rPr b="0" sz="750">
+              <a:rPr sz="750" b="0">
                 <a:solidFill>
                   <a:srgbClr val="667085"/>
                 </a:solidFill>
@@ -32840,7 +32836,7 @@
 </file>
 
 <file path=ppt/slides/slide9.xml><?xml version="1.0" encoding="utf-8"?>
-<p:sld xmlns:a="http://schemas.openxmlformats.org/drawingml/2006/main" xmlns:p="http://schemas.openxmlformats.org/presentationml/2006/main" xmlns:r="http://schemas.openxmlformats.org/officeDocument/2006/relationships">
+<p:sld xmlns:a="http://schemas.openxmlformats.org/drawingml/2006/main" xmlns:r="http://schemas.openxmlformats.org/officeDocument/2006/relationships" xmlns:p="http://schemas.openxmlformats.org/presentationml/2006/main">
   <p:cSld>
     <p:bg>
       <p:bgPr>
@@ -32893,14 +32889,14 @@
           </a:ln>
         </p:spPr>
         <p:txBody>
-          <a:bodyPr anchor="t" bIns="0" lIns="0" rIns="0" tIns="0" wrap="square">
+          <a:bodyPr wrap="square" lIns="0" tIns="0" rIns="0" bIns="0" anchor="t">
             <a:normAutofit/>
           </a:bodyPr>
           <a:lstStyle/>
           <a:p>
             <a:pPr algn="l">
               <a:buNone/>
-              <a:defRPr b="1" sz="975">
+              <a:defRPr sz="975" b="1">
                 <a:solidFill>
                   <a:srgbClr val="2563EB"/>
                 </a:solidFill>
@@ -32910,7 +32906,7 @@
               </a:defRPr>
             </a:pPr>
             <a:r>
-              <a:rPr b="1" sz="975">
+              <a:rPr sz="975" b="1">
                 <a:solidFill>
                   <a:srgbClr val="2563EB"/>
                 </a:solidFill>
@@ -32952,13 +32948,13 @@
           </a:ln>
         </p:spPr>
         <p:txBody>
-          <a:bodyPr anchor="ctr" bIns="0" lIns="0" rIns="0" tIns="0" wrap="square">
+          <a:bodyPr wrap="square" lIns="0" tIns="0" rIns="0" bIns="0" anchor="ctr">
             <a:normAutofit/>
           </a:bodyPr>
           <a:lstStyle/>
           <a:p>
             <a:pPr>
-              <a:defRPr b="1" sz="3000">
+              <a:defRPr sz="3000" b="1">
                 <a:solidFill>
                   <a:srgbClr val="111827"/>
                 </a:solidFill>
@@ -32968,7 +32964,7 @@
               </a:defRPr>
             </a:pPr>
             <a:r>
-              <a:rPr altLang="zh-TW" b="1" dirty="0" lang="en-US" sz="3000">
+              <a:rPr lang="en-US" altLang="zh-TW" sz="3000" b="1" dirty="0">
                 <a:solidFill>
                   <a:srgbClr val="111827"/>
                 </a:solidFill>
@@ -33032,14 +33028,14 @@
           </a:ln>
         </p:spPr>
         <p:txBody>
-          <a:bodyPr anchor="t" bIns="0" lIns="0" rIns="0" tIns="0" wrap="square">
+          <a:bodyPr wrap="square" lIns="0" tIns="0" rIns="0" bIns="0" anchor="t">
             <a:normAutofit/>
           </a:bodyPr>
           <a:lstStyle/>
           <a:p>
             <a:pPr algn="r">
               <a:buNone/>
-              <a:defRPr b="0" sz="900">
+              <a:defRPr sz="900" b="0">
                 <a:solidFill>
                   <a:srgbClr val="667085"/>
                 </a:solidFill>
@@ -33049,7 +33045,7 @@
               </a:defRPr>
             </a:pPr>
             <a:r>
-              <a:rPr b="0" sz="900">
+              <a:rPr sz="900" b="0">
                 <a:solidFill>
                   <a:srgbClr val="667085"/>
                 </a:solidFill>
@@ -33157,14 +33153,14 @@
           </a:ln>
         </p:spPr>
         <p:txBody>
-          <a:bodyPr anchor="t" bIns="0" lIns="0" rIns="0" tIns="0" wrap="square">
+          <a:bodyPr wrap="square" lIns="0" tIns="0" rIns="0" bIns="0" anchor="t">
             <a:normAutofit/>
           </a:bodyPr>
           <a:lstStyle/>
           <a:p>
             <a:pPr algn="ctr">
               <a:buNone/>
-              <a:defRPr b="1" sz="2550">
+              <a:defRPr sz="2550" b="1">
                 <a:solidFill>
                   <a:srgbClr val="2563EB"/>
                 </a:solidFill>
@@ -33174,7 +33170,7 @@
               </a:defRPr>
             </a:pPr>
             <a:r>
-              <a:rPr b="1" sz="2550">
+              <a:rPr sz="2550" b="1">
                 <a:solidFill>
                   <a:srgbClr val="2563EB"/>
                 </a:solidFill>
@@ -33216,14 +33212,14 @@
           </a:ln>
         </p:spPr>
         <p:txBody>
-          <a:bodyPr anchor="t" bIns="0" lIns="0" rIns="0" tIns="0" wrap="square">
+          <a:bodyPr wrap="square" lIns="0" tIns="0" rIns="0" bIns="0" anchor="t">
             <a:normAutofit/>
           </a:bodyPr>
           <a:lstStyle/>
           <a:p>
             <a:pPr algn="ctr">
               <a:buNone/>
-              <a:defRPr b="1" sz="2550">
+              <a:defRPr sz="2550" b="1">
                 <a:solidFill>
                   <a:srgbClr val="2563EB"/>
                 </a:solidFill>
@@ -33233,7 +33229,7 @@
               </a:defRPr>
             </a:pPr>
             <a:r>
-              <a:rPr b="1" sz="2550">
+              <a:rPr sz="2550" b="1">
                 <a:solidFill>
                   <a:srgbClr val="2563EB"/>
                 </a:solidFill>
@@ -33275,14 +33271,14 @@
           </a:ln>
         </p:spPr>
         <p:txBody>
-          <a:bodyPr anchor="t" bIns="0" lIns="0" rIns="0" tIns="0" wrap="square">
+          <a:bodyPr wrap="square" lIns="0" tIns="0" rIns="0" bIns="0" anchor="t">
             <a:normAutofit/>
           </a:bodyPr>
           <a:lstStyle/>
           <a:p>
             <a:pPr algn="ctr">
               <a:buNone/>
-              <a:defRPr b="1" sz="2550">
+              <a:defRPr sz="2550" b="1">
                 <a:solidFill>
                   <a:srgbClr val="667085"/>
                 </a:solidFill>
@@ -33292,7 +33288,7 @@
               </a:defRPr>
             </a:pPr>
             <a:r>
-              <a:rPr b="1" sz="2550">
+              <a:rPr sz="2550" b="1">
                 <a:solidFill>
                   <a:srgbClr val="667085"/>
                 </a:solidFill>
@@ -33326,7 +33322,7 @@
           </a:xfrm>
           <a:prstGeom prst="roundRect">
             <a:avLst>
-              <a:gd fmla="val 3200" name="adj"/>
+              <a:gd name="adj" fmla="val 3200"/>
             </a:avLst>
           </a:prstGeom>
           <a:solidFill>
@@ -33376,14 +33372,14 @@
           </a:ln>
         </p:spPr>
         <p:txBody>
-          <a:bodyPr anchor="t" bIns="0" lIns="0" rIns="0" tIns="0" wrap="square">
+          <a:bodyPr wrap="square" lIns="0" tIns="0" rIns="0" bIns="0" anchor="t">
             <a:normAutofit/>
           </a:bodyPr>
           <a:lstStyle/>
           <a:p>
             <a:pPr algn="l">
               <a:buNone/>
-              <a:defRPr b="1" sz="1350">
+              <a:defRPr sz="1350" b="1">
                 <a:solidFill>
                   <a:srgbClr val="2563EB"/>
                 </a:solidFill>
@@ -33393,7 +33389,7 @@
               </a:defRPr>
             </a:pPr>
             <a:r>
-              <a:rPr b="1" sz="1350">
+              <a:rPr sz="1350" b="1">
                 <a:solidFill>
                   <a:srgbClr val="2563EB"/>
                 </a:solidFill>
@@ -33435,14 +33431,14 @@
           </a:ln>
         </p:spPr>
         <p:txBody>
-          <a:bodyPr anchor="t" bIns="0" lIns="0" rIns="0" tIns="0" wrap="square">
+          <a:bodyPr wrap="square" lIns="0" tIns="0" rIns="0" bIns="0" anchor="t">
             <a:normAutofit/>
           </a:bodyPr>
           <a:lstStyle/>
           <a:p>
             <a:pPr algn="l">
               <a:buNone/>
-              <a:defRPr b="1" sz="1875">
+              <a:defRPr sz="1875" b="1">
                 <a:solidFill>
                   <a:srgbClr val="2563EB"/>
                 </a:solidFill>
@@ -33452,7 +33448,7 @@
               </a:defRPr>
             </a:pPr>
             <a:r>
-              <a:rPr b="1" sz="1875">
+              <a:rPr sz="1875" b="1">
                 <a:solidFill>
                   <a:srgbClr val="2563EB"/>
                 </a:solidFill>
@@ -33494,7 +33490,7 @@
           </a:ln>
         </p:spPr>
         <p:txBody>
-          <a:bodyPr anchor="t" bIns="0" lIns="0" rIns="0" tIns="0" wrap="square">
+          <a:bodyPr wrap="square" lIns="0" tIns="0" rIns="0" bIns="0" anchor="t">
             <a:normAutofit/>
           </a:bodyPr>
           <a:lstStyle/>
@@ -33504,7 +33500,7 @@
                 <a:spcPct val="100000"/>
               </a:lnSpc>
               <a:buNone/>
-              <a:defRPr b="0" sz="1050">
+              <a:defRPr sz="1050" b="0">
                 <a:solidFill>
                   <a:srgbClr val="101828"/>
                 </a:solidFill>
@@ -33514,7 +33510,7 @@
               </a:defRPr>
             </a:pPr>
             <a:r>
-              <a:rPr b="0" dirty="0" lang="en-US" sz="1050">
+              <a:rPr lang="en-US" sz="1050" b="0" dirty="0">
                 <a:solidFill>
                   <a:srgbClr val="101828"/>
                 </a:solidFill>
@@ -33525,7 +33521,7 @@
               <a:t>- </a:t>
             </a:r>
             <a:r>
-              <a:rPr b="0" dirty="0" err="1" sz="1050">
+              <a:rPr sz="1050" b="0" dirty="0" err="1">
                 <a:solidFill>
                   <a:srgbClr val="101828"/>
                 </a:solidFill>
@@ -33535,7 +33531,7 @@
               </a:rPr>
               <a:t>維運／備份／監控</a:t>
             </a:r>
-            <a:endParaRPr b="0" dirty="0" sz="1050">
+            <a:endParaRPr sz="1050" b="0" dirty="0">
               <a:solidFill>
                 <a:srgbClr val="101828"/>
               </a:solidFill>
@@ -33546,7 +33542,7 @@
           </a:p>
           <a:p>
             <a:pPr>
-              <a:defRPr b="0" sz="1050">
+              <a:defRPr sz="1050" b="0">
                 <a:solidFill>
                   <a:srgbClr val="101828"/>
                 </a:solidFill>
@@ -33556,7 +33552,7 @@
               </a:defRPr>
             </a:pPr>
             <a:r>
-              <a:rPr altLang="zh-TW" dirty="0" lang="en" sz="1050">
+              <a:rPr lang="en" altLang="zh-TW" sz="1050" dirty="0">
                 <a:solidFill>
                   <a:srgbClr val="101828"/>
                 </a:solidFill>
@@ -33567,7 +33563,7 @@
               <a:t>- Pilot </a:t>
             </a:r>
             <a:r>
-              <a:rPr b="0" dirty="0" err="1" sz="1050">
+              <a:rPr sz="1050" b="0" dirty="0" err="1">
                 <a:solidFill>
                   <a:srgbClr val="101828"/>
                 </a:solidFill>
@@ -33578,7 +33574,7 @@
               <a:t>應用</a:t>
             </a:r>
             <a:r>
-              <a:rPr dirty="0" lang="en-US" sz="1050">
+              <a:rPr lang="en-US" sz="1050" dirty="0">
                 <a:solidFill>
                   <a:srgbClr val="101828"/>
                 </a:solidFill>
@@ -33588,7 +33584,7 @@
               </a:rPr>
               <a:t>: Account Center</a:t>
             </a:r>
-            <a:endParaRPr b="0" dirty="0" sz="1050">
+            <a:endParaRPr sz="1050" b="0" dirty="0">
               <a:solidFill>
                 <a:srgbClr val="101828"/>
               </a:solidFill>
@@ -33603,7 +33599,7 @@
                 <a:spcPct val="100000"/>
               </a:lnSpc>
               <a:buNone/>
-              <a:defRPr b="0" sz="1050">
+              <a:defRPr sz="1050" b="0">
                 <a:solidFill>
                   <a:srgbClr val="101828"/>
                 </a:solidFill>
@@ -33613,7 +33609,7 @@
               </a:defRPr>
             </a:pPr>
             <a:r>
-              <a:rPr b="0" dirty="0" lang="en-US" sz="1050">
+              <a:rPr lang="en-US" sz="1050" b="0" dirty="0">
                 <a:solidFill>
                   <a:srgbClr val="101828"/>
                 </a:solidFill>
@@ -33624,7 +33620,7 @@
               <a:t>- </a:t>
             </a:r>
             <a:r>
-              <a:rPr b="0" dirty="0" err="1" sz="1050">
+              <a:rPr sz="1050" b="0" dirty="0" err="1">
                 <a:solidFill>
                   <a:srgbClr val="101828"/>
                 </a:solidFill>
@@ -33635,7 +33631,7 @@
               <a:t>協作</a:t>
             </a:r>
             <a:r>
-              <a:rPr b="0" dirty="0" sz="1050">
+              <a:rPr sz="1050" b="0" dirty="0">
                 <a:solidFill>
                   <a:srgbClr val="101828"/>
                 </a:solidFill>
@@ -33646,7 +33642,7 @@
               <a:t>：</a:t>
             </a:r>
             <a:r>
-              <a:rPr altLang="en-US" b="0" dirty="0" lang="zh-TW" sz="1050">
+              <a:rPr lang="zh-TW" altLang="en-US" sz="1050" b="0" dirty="0">
                 <a:solidFill>
                   <a:srgbClr val="101828"/>
                 </a:solidFill>
@@ -33656,7 +33652,7 @@
               </a:rPr>
               <a:t>僅需虛擬化平台資源</a:t>
             </a:r>
-            <a:endParaRPr b="0" dirty="0" sz="1050">
+            <a:endParaRPr sz="1050" b="0" dirty="0">
               <a:solidFill>
                 <a:srgbClr val="101828"/>
               </a:solidFill>
@@ -33688,7 +33684,7 @@
           </a:xfrm>
           <a:prstGeom prst="roundRect">
             <a:avLst>
-              <a:gd fmla="val 3200" name="adj"/>
+              <a:gd name="adj" fmla="val 3200"/>
             </a:avLst>
           </a:prstGeom>
           <a:solidFill>
@@ -33738,14 +33734,14 @@
           </a:ln>
         </p:spPr>
         <p:txBody>
-          <a:bodyPr anchor="t" bIns="0" lIns="0" rIns="0" tIns="0" wrap="square">
+          <a:bodyPr wrap="square" lIns="0" tIns="0" rIns="0" bIns="0" anchor="t">
             <a:normAutofit/>
           </a:bodyPr>
           <a:lstStyle/>
           <a:p>
             <a:pPr algn="l">
               <a:buNone/>
-              <a:defRPr b="1" sz="1350">
+              <a:defRPr sz="1350" b="1">
                 <a:solidFill>
                   <a:srgbClr val="2563EB"/>
                 </a:solidFill>
@@ -33755,7 +33751,7 @@
               </a:defRPr>
             </a:pPr>
             <a:r>
-              <a:rPr b="1" sz="1350">
+              <a:rPr sz="1350" b="1">
                 <a:solidFill>
                   <a:srgbClr val="2563EB"/>
                 </a:solidFill>
@@ -33797,14 +33793,14 @@
           </a:ln>
         </p:spPr>
         <p:txBody>
-          <a:bodyPr anchor="t" bIns="0" lIns="0" rIns="0" tIns="0" wrap="square">
+          <a:bodyPr wrap="square" lIns="0" tIns="0" rIns="0" bIns="0" anchor="t">
             <a:normAutofit/>
           </a:bodyPr>
           <a:lstStyle/>
           <a:p>
             <a:pPr algn="l">
               <a:buNone/>
-              <a:defRPr b="1" sz="1875">
+              <a:defRPr sz="1875" b="1">
                 <a:solidFill>
                   <a:srgbClr val="2563EB"/>
                 </a:solidFill>
@@ -33814,7 +33810,7 @@
               </a:defRPr>
             </a:pPr>
             <a:r>
-              <a:rPr b="1" sz="1875">
+              <a:rPr sz="1875" b="1">
                 <a:solidFill>
                   <a:srgbClr val="2563EB"/>
                 </a:solidFill>
@@ -33856,7 +33852,7 @@
           </a:ln>
         </p:spPr>
         <p:txBody>
-          <a:bodyPr anchor="t" bIns="0" lIns="0" rIns="0" tIns="0" wrap="square">
+          <a:bodyPr wrap="square" lIns="0" tIns="0" rIns="0" bIns="0" anchor="t">
             <a:normAutofit/>
           </a:bodyPr>
           <a:lstStyle/>
@@ -33866,7 +33862,7 @@
                 <a:spcPct val="100000"/>
               </a:lnSpc>
               <a:buNone/>
-              <a:defRPr b="0" sz="1050">
+              <a:defRPr sz="1050" b="0">
                 <a:solidFill>
                   <a:srgbClr val="101828"/>
                 </a:solidFill>
@@ -33876,7 +33872,7 @@
               </a:defRPr>
             </a:pPr>
             <a:r>
-              <a:rPr b="0" dirty="0" lang="en-US" sz="1050">
+              <a:rPr lang="en-US" sz="1050" b="0" dirty="0">
                 <a:solidFill>
                   <a:srgbClr val="101828"/>
                 </a:solidFill>
@@ -33887,7 +33883,7 @@
               <a:t>- </a:t>
             </a:r>
             <a:r>
-              <a:rPr b="0" dirty="0" sz="1050">
+              <a:rPr sz="1050" b="0" dirty="0">
                 <a:solidFill>
                   <a:srgbClr val="101828"/>
                 </a:solidFill>
@@ -33898,7 +33894,7 @@
               <a:t>IDC </a:t>
             </a:r>
             <a:r>
-              <a:rPr b="0" dirty="0" err="1" sz="1050">
+              <a:rPr sz="1050" b="0" dirty="0" err="1">
                 <a:solidFill>
                   <a:srgbClr val="101828"/>
                 </a:solidFill>
@@ -33909,7 +33905,7 @@
               <a:t>主寫／EDC</a:t>
             </a:r>
             <a:r>
-              <a:rPr b="0" dirty="0" sz="1050">
+              <a:rPr sz="1050" b="0" dirty="0">
                 <a:solidFill>
                   <a:srgbClr val="101828"/>
                 </a:solidFill>
@@ -33920,7 +33916,7 @@
               <a:t> </a:t>
             </a:r>
             <a:r>
-              <a:rPr b="0" dirty="0" err="1" sz="1050">
+              <a:rPr sz="1050" b="0" dirty="0" err="1">
                 <a:solidFill>
                   <a:srgbClr val="101828"/>
                 </a:solidFill>
@@ -33930,7 +33926,7 @@
               </a:rPr>
               <a:t>副本</a:t>
             </a:r>
-            <a:endParaRPr b="0" dirty="0" sz="1050">
+            <a:endParaRPr sz="1050" b="0" dirty="0">
               <a:solidFill>
                 <a:srgbClr val="101828"/>
               </a:solidFill>
@@ -33945,7 +33941,7 @@
                 <a:spcPct val="100000"/>
               </a:lnSpc>
               <a:buNone/>
-              <a:defRPr b="0" sz="1050">
+              <a:defRPr sz="1050" b="0">
                 <a:solidFill>
                   <a:srgbClr val="101828"/>
                 </a:solidFill>
@@ -33955,7 +33951,7 @@
               </a:defRPr>
             </a:pPr>
             <a:r>
-              <a:rPr b="0" dirty="0" lang="en-US" sz="1050">
+              <a:rPr lang="en-US" sz="1050" b="0" dirty="0">
                 <a:solidFill>
                   <a:srgbClr val="101828"/>
                 </a:solidFill>
@@ -33966,7 +33962,7 @@
               <a:t>- </a:t>
             </a:r>
             <a:r>
-              <a:rPr b="0" dirty="0" err="1" sz="1050">
+              <a:rPr sz="1050" b="0" dirty="0" err="1">
                 <a:solidFill>
                   <a:srgbClr val="101828"/>
                 </a:solidFill>
@@ -33976,7 +33972,7 @@
               </a:rPr>
               <a:t>切換與回復演練</a:t>
             </a:r>
-            <a:endParaRPr b="0" dirty="0" sz="1050">
+            <a:endParaRPr sz="1050" b="0" dirty="0">
               <a:solidFill>
                 <a:srgbClr val="101828"/>
               </a:solidFill>
@@ -33991,7 +33987,7 @@
                 <a:spcPct val="100000"/>
               </a:lnSpc>
               <a:buNone/>
-              <a:defRPr b="0" sz="1050">
+              <a:defRPr sz="1050" b="0">
                 <a:solidFill>
                   <a:srgbClr val="101828"/>
                 </a:solidFill>
@@ -34001,7 +33997,7 @@
               </a:defRPr>
             </a:pPr>
             <a:r>
-              <a:rPr b="0" dirty="0" lang="en-US" sz="1050">
+              <a:rPr lang="en-US" sz="1050" b="0" dirty="0">
                 <a:solidFill>
                   <a:srgbClr val="101828"/>
                 </a:solidFill>
@@ -34012,7 +34008,7 @@
               <a:t>- </a:t>
             </a:r>
             <a:r>
-              <a:rPr b="0" dirty="0" err="1" sz="1050">
+              <a:rPr sz="1050" b="0" dirty="0" err="1">
                 <a:solidFill>
                   <a:srgbClr val="101828"/>
                 </a:solidFill>
@@ -34023,7 +34019,7 @@
               <a:t>協作：</a:t>
             </a:r>
             <a:r>
-              <a:rPr b="0" dirty="0" err="1" lang="en-US" sz="1050">
+              <a:rPr lang="en-US" sz="1050" b="0" dirty="0" err="1">
                 <a:solidFill>
                   <a:srgbClr val="101828"/>
                 </a:solidFill>
@@ -34034,7 +34030,7 @@
               <a:t>SE</a:t>
             </a:r>
             <a:r>
-              <a:rPr b="0" dirty="0" lang="en-US" sz="1050">
+              <a:rPr lang="en-US" sz="1050" b="0" dirty="0">
                 <a:solidFill>
                   <a:srgbClr val="101828"/>
                 </a:solidFill>
@@ -34045,7 +34041,7 @@
               <a:t> / HVM / </a:t>
             </a:r>
             <a:r>
-              <a:rPr b="0" dirty="0" sz="1050">
+              <a:rPr sz="1050" b="0" dirty="0">
                 <a:solidFill>
                   <a:srgbClr val="101828"/>
                 </a:solidFill>
@@ -34079,7 +34075,7 @@
           </a:xfrm>
           <a:prstGeom prst="roundRect">
             <a:avLst>
-              <a:gd fmla="val 3200" name="adj"/>
+              <a:gd name="adj" fmla="val 3200"/>
             </a:avLst>
           </a:prstGeom>
           <a:solidFill>
@@ -34129,14 +34125,14 @@
           </a:ln>
         </p:spPr>
         <p:txBody>
-          <a:bodyPr anchor="t" bIns="0" lIns="0" rIns="0" tIns="0" wrap="square">
+          <a:bodyPr wrap="square" lIns="0" tIns="0" rIns="0" bIns="0" anchor="t">
             <a:normAutofit/>
           </a:bodyPr>
           <a:lstStyle/>
           <a:p>
             <a:pPr algn="l">
               <a:buNone/>
-              <a:defRPr b="1" sz="1350">
+              <a:defRPr sz="1350" b="1">
                 <a:solidFill>
                   <a:srgbClr val="2563EB"/>
                 </a:solidFill>
@@ -34146,7 +34142,7 @@
               </a:defRPr>
             </a:pPr>
             <a:r>
-              <a:rPr b="1" sz="1350">
+              <a:rPr sz="1350" b="1">
                 <a:solidFill>
                   <a:srgbClr val="2563EB"/>
                 </a:solidFill>
@@ -34188,14 +34184,14 @@
           </a:ln>
         </p:spPr>
         <p:txBody>
-          <a:bodyPr anchor="t" bIns="0" lIns="0" rIns="0" tIns="0" wrap="square">
+          <a:bodyPr wrap="square" lIns="0" tIns="0" rIns="0" bIns="0" anchor="t">
             <a:normAutofit/>
           </a:bodyPr>
           <a:lstStyle/>
           <a:p>
             <a:pPr algn="l">
               <a:buNone/>
-              <a:defRPr b="1" sz="1875">
+              <a:defRPr sz="1875" b="1">
                 <a:solidFill>
                   <a:srgbClr val="2563EB"/>
                 </a:solidFill>
@@ -34205,7 +34201,7 @@
               </a:defRPr>
             </a:pPr>
             <a:r>
-              <a:rPr b="1" sz="1875">
+              <a:rPr sz="1875" b="1">
                 <a:solidFill>
                   <a:srgbClr val="2563EB"/>
                 </a:solidFill>
@@ -34247,7 +34243,7 @@
           </a:ln>
         </p:spPr>
         <p:txBody>
-          <a:bodyPr anchor="t" bIns="0" lIns="0" rIns="0" tIns="0" wrap="square">
+          <a:bodyPr wrap="square" lIns="0" tIns="0" rIns="0" bIns="0" anchor="t">
             <a:normAutofit/>
           </a:bodyPr>
           <a:lstStyle/>
@@ -34257,7 +34253,7 @@
                 <a:spcPct val="100000"/>
               </a:lnSpc>
               <a:buNone/>
-              <a:defRPr b="0" sz="1050">
+              <a:defRPr sz="1050" b="0">
                 <a:solidFill>
                   <a:srgbClr val="101828"/>
                 </a:solidFill>
@@ -34267,7 +34263,7 @@
               </a:defRPr>
             </a:pPr>
             <a:r>
-              <a:rPr b="0" dirty="0" lang="en-US" sz="1050">
+              <a:rPr lang="en-US" sz="1050" b="0" dirty="0">
                 <a:solidFill>
                   <a:srgbClr val="101828"/>
                 </a:solidFill>
@@ -34278,7 +34274,7 @@
               <a:t>- </a:t>
             </a:r>
             <a:r>
-              <a:rPr b="0" dirty="0" sz="1050">
+              <a:rPr sz="1050" b="0" dirty="0">
                 <a:solidFill>
                   <a:srgbClr val="101828"/>
                 </a:solidFill>
@@ -34289,7 +34285,7 @@
               <a:t>EDC </a:t>
             </a:r>
             <a:r>
-              <a:rPr b="0" dirty="0" err="1" sz="1050">
+              <a:rPr sz="1050" b="0" dirty="0" err="1">
                 <a:solidFill>
                   <a:srgbClr val="101828"/>
                 </a:solidFill>
@@ -34299,7 +34295,7 @@
               </a:rPr>
               <a:t>就近讀</a:t>
             </a:r>
-            <a:endParaRPr b="0" dirty="0" sz="1050">
+            <a:endParaRPr sz="1050" b="0" dirty="0">
               <a:solidFill>
                 <a:srgbClr val="101828"/>
               </a:solidFill>
@@ -34314,7 +34310,7 @@
                 <a:spcPct val="100000"/>
               </a:lnSpc>
               <a:buNone/>
-              <a:defRPr b="0" sz="1050">
+              <a:defRPr sz="1050" b="0">
                 <a:solidFill>
                   <a:srgbClr val="101828"/>
                 </a:solidFill>
@@ -34324,7 +34320,7 @@
               </a:defRPr>
             </a:pPr>
             <a:r>
-              <a:rPr b="0" dirty="0" lang="en-US" sz="1050">
+              <a:rPr lang="en-US" sz="1050" b="0" dirty="0">
                 <a:solidFill>
                   <a:srgbClr val="101828"/>
                 </a:solidFill>
@@ -34335,7 +34331,7 @@
               <a:t>- </a:t>
             </a:r>
             <a:r>
-              <a:rPr b="0" dirty="0" err="1" lang="en-US" sz="1050">
+              <a:rPr lang="en-US" sz="1050" b="0" dirty="0" err="1">
                 <a:solidFill>
                   <a:srgbClr val="101828"/>
                 </a:solidFill>
@@ -34346,7 +34342,7 @@
               <a:t>確認可在</a:t>
             </a:r>
             <a:r>
-              <a:rPr b="0" dirty="0" lang="en-US" sz="1050">
+              <a:rPr lang="en-US" sz="1050" b="0" dirty="0">
                 <a:solidFill>
                   <a:srgbClr val="101828"/>
                 </a:solidFill>
@@ -34357,7 +34353,7 @@
               <a:t> EDC </a:t>
             </a:r>
             <a:r>
-              <a:rPr b="0" dirty="0" err="1" lang="en-US" sz="1050">
+              <a:rPr lang="en-US" sz="1050" b="0" dirty="0" err="1">
                 <a:solidFill>
                   <a:srgbClr val="101828"/>
                 </a:solidFill>
@@ -34368,7 +34364,7 @@
               <a:t>獨立運作的</a:t>
             </a:r>
             <a:r>
-              <a:rPr dirty="0" err="1" lang="en-US" sz="1050">
+              <a:rPr lang="en-US" sz="1050" dirty="0" err="1">
                 <a:solidFill>
                   <a:srgbClr val="101828"/>
                 </a:solidFill>
@@ -34378,7 +34374,7 @@
               </a:rPr>
               <a:t>需求</a:t>
             </a:r>
-            <a:endParaRPr b="0" dirty="0" lang="en-US" sz="1050">
+            <a:endParaRPr lang="en-US" sz="1050" b="0" dirty="0">
               <a:solidFill>
                 <a:srgbClr val="101828"/>
               </a:solidFill>
@@ -34389,7 +34385,7 @@
           </a:p>
           <a:p>
             <a:pPr>
-              <a:defRPr b="0" sz="1050">
+              <a:defRPr sz="1050" b="0">
                 <a:solidFill>
                   <a:srgbClr val="101828"/>
                 </a:solidFill>
@@ -34399,7 +34395,7 @@
               </a:defRPr>
             </a:pPr>
             <a:r>
-              <a:rPr b="0" dirty="0" err="1" sz="1050">
+              <a:rPr sz="1050" b="0" dirty="0" err="1">
                 <a:solidFill>
                   <a:srgbClr val="101828"/>
                 </a:solidFill>
@@ -34410,7 +34406,7 @@
               <a:t>協作：TSD／RD</a:t>
             </a:r>
             <a:r>
-              <a:rPr b="0" dirty="0" lang="en-US" sz="1050">
+              <a:rPr lang="en-US" sz="1050" b="0" dirty="0">
                 <a:solidFill>
                   <a:srgbClr val="101828"/>
                 </a:solidFill>
@@ -34421,7 +34417,7 @@
               <a:t> / </a:t>
             </a:r>
             <a:r>
-              <a:rPr altLang="zh-TW" dirty="0" lang="en-US" sz="1050">
+              <a:rPr lang="en-US" altLang="zh-TW" sz="1050" dirty="0">
                 <a:solidFill>
                   <a:srgbClr val="101828"/>
                 </a:solidFill>
@@ -34455,7 +34451,7 @@
           </a:xfrm>
           <a:prstGeom prst="roundRect">
             <a:avLst>
-              <a:gd fmla="val 3200" name="adj"/>
+              <a:gd name="adj" fmla="val 3200"/>
             </a:avLst>
           </a:prstGeom>
           <a:solidFill>
@@ -34505,14 +34501,14 @@
           </a:ln>
         </p:spPr>
         <p:txBody>
-          <a:bodyPr anchor="t" bIns="0" lIns="0" rIns="0" tIns="0" wrap="square">
+          <a:bodyPr wrap="square" lIns="0" tIns="0" rIns="0" bIns="0" anchor="t">
             <a:normAutofit/>
           </a:bodyPr>
           <a:lstStyle/>
           <a:p>
             <a:pPr algn="l">
               <a:buNone/>
-              <a:defRPr b="1" sz="1350">
+              <a:defRPr sz="1350" b="1">
                 <a:solidFill>
                   <a:srgbClr val="667085"/>
                 </a:solidFill>
@@ -34522,7 +34518,7 @@
               </a:defRPr>
             </a:pPr>
             <a:r>
-              <a:rPr b="1" sz="1350">
+              <a:rPr sz="1350" b="1">
                 <a:solidFill>
                   <a:srgbClr val="667085"/>
                 </a:solidFill>
@@ -34564,14 +34560,14 @@
           </a:ln>
         </p:spPr>
         <p:txBody>
-          <a:bodyPr anchor="t" bIns="0" lIns="0" rIns="0" tIns="0" wrap="square">
+          <a:bodyPr wrap="square" lIns="0" tIns="0" rIns="0" bIns="0" anchor="t">
             <a:normAutofit/>
           </a:bodyPr>
           <a:lstStyle/>
           <a:p>
             <a:pPr algn="l">
               <a:buNone/>
-              <a:defRPr b="1" sz="1875">
+              <a:defRPr sz="1875" b="1">
                 <a:solidFill>
                   <a:srgbClr val="667085"/>
                 </a:solidFill>
@@ -34581,7 +34577,7 @@
               </a:defRPr>
             </a:pPr>
             <a:r>
-              <a:rPr b="1" sz="1875">
+              <a:rPr sz="1875" b="1">
                 <a:solidFill>
                   <a:srgbClr val="667085"/>
                 </a:solidFill>
@@ -34623,7 +34619,7 @@
           </a:ln>
         </p:spPr>
         <p:txBody>
-          <a:bodyPr anchor="t" bIns="0" lIns="0" rIns="0" tIns="0" wrap="square">
+          <a:bodyPr wrap="square" lIns="0" tIns="0" rIns="0" bIns="0" anchor="t">
             <a:normAutofit/>
           </a:bodyPr>
           <a:lstStyle/>
@@ -34633,7 +34629,7 @@
                 <a:spcPct val="100000"/>
               </a:lnSpc>
               <a:buNone/>
-              <a:defRPr b="0" sz="1050">
+              <a:defRPr sz="1050" b="0">
                 <a:solidFill>
                   <a:srgbClr val="101828"/>
                 </a:solidFill>
@@ -34643,7 +34639,7 @@
               </a:defRPr>
             </a:pPr>
             <a:r>
-              <a:rPr b="0" dirty="0" err="1" sz="1050">
+              <a:rPr sz="1050" b="0" dirty="0" err="1">
                 <a:solidFill>
                   <a:srgbClr val="101828"/>
                 </a:solidFill>
@@ -34654,7 +34650,7 @@
               <a:t>雙區寫入需求與</a:t>
             </a:r>
             <a:r>
-              <a:rPr b="0" dirty="0" sz="1050">
+              <a:rPr sz="1050" b="0" dirty="0">
                 <a:solidFill>
                   <a:srgbClr val="101828"/>
                 </a:solidFill>
@@ -34665,7 +34661,7 @@
               <a:t> ROI </a:t>
             </a:r>
             <a:r>
-              <a:rPr b="0" dirty="0" err="1" sz="1050">
+              <a:rPr sz="1050" b="0" dirty="0" err="1">
                 <a:solidFill>
                   <a:srgbClr val="101828"/>
                 </a:solidFill>
@@ -34675,7 +34671,7 @@
               </a:rPr>
               <a:t>成立</a:t>
             </a:r>
-            <a:endParaRPr b="0" dirty="0" sz="1050">
+            <a:endParaRPr sz="1050" b="0" dirty="0">
               <a:solidFill>
                 <a:srgbClr val="101828"/>
               </a:solidFill>
@@ -34690,7 +34686,7 @@
                 <a:spcPct val="100000"/>
               </a:lnSpc>
               <a:buNone/>
-              <a:defRPr b="0" sz="1050">
+              <a:defRPr sz="1050" b="0">
                 <a:solidFill>
                   <a:srgbClr val="101828"/>
                 </a:solidFill>
@@ -34700,7 +34696,7 @@
               </a:defRPr>
             </a:pPr>
             <a:r>
-              <a:rPr b="0" dirty="0" err="1" sz="1050">
+              <a:rPr sz="1050" b="0" dirty="0" err="1">
                 <a:solidFill>
                   <a:srgbClr val="101828"/>
                 </a:solidFill>
@@ -34711,7 +34707,7 @@
               <a:t>非</a:t>
             </a:r>
             <a:r>
-              <a:rPr b="0" dirty="0" sz="1050">
+              <a:rPr sz="1050" b="0" dirty="0">
                 <a:solidFill>
                   <a:srgbClr val="101828"/>
                 </a:solidFill>
@@ -34722,7 +34718,7 @@
               <a:t> DB </a:t>
             </a:r>
             <a:r>
-              <a:rPr b="0" dirty="0" err="1" sz="1050">
+              <a:rPr sz="1050" b="0" dirty="0" err="1">
                 <a:solidFill>
                   <a:srgbClr val="101828"/>
                 </a:solidFill>
@@ -34732,7 +34728,7 @@
               </a:rPr>
               <a:t>阻礙解除後再評估</a:t>
             </a:r>
-            <a:endParaRPr b="0" dirty="0" sz="1050">
+            <a:endParaRPr sz="1050" b="0" dirty="0">
               <a:solidFill>
                 <a:srgbClr val="101828"/>
               </a:solidFill>
@@ -34810,14 +34806,14 @@
           </a:ln>
         </p:spPr>
         <p:txBody>
-          <a:bodyPr anchor="t" bIns="0" lIns="0" rIns="0" tIns="0" wrap="square">
+          <a:bodyPr wrap="square" lIns="0" tIns="0" rIns="0" bIns="0" anchor="t">
             <a:normAutofit fontScale="92500" lnSpcReduction="20000"/>
           </a:bodyPr>
           <a:lstStyle/>
           <a:p>
             <a:pPr algn="l">
               <a:buNone/>
-              <a:defRPr b="1" sz="1575">
+              <a:defRPr sz="1575" b="1">
                 <a:solidFill>
                   <a:srgbClr val="16803C"/>
                 </a:solidFill>
@@ -34827,7 +34823,7 @@
               </a:defRPr>
             </a:pPr>
             <a:r>
-              <a:rPr b="1" dirty="0" err="1" sz="1575">
+              <a:rPr sz="1575" b="1" dirty="0" err="1">
                 <a:solidFill>
                   <a:srgbClr val="16803C"/>
                 </a:solidFill>
@@ -34907,14 +34903,14 @@
           </a:ln>
         </p:spPr>
         <p:txBody>
-          <a:bodyPr anchor="t" bIns="0" lIns="0" rIns="0" tIns="0" wrap="square">
+          <a:bodyPr wrap="square" lIns="0" tIns="0" rIns="0" bIns="0" anchor="t">
             <a:normAutofit/>
           </a:bodyPr>
           <a:lstStyle/>
           <a:p>
             <a:pPr algn="ctr">
               <a:buNone/>
-              <a:defRPr b="1" sz="1650">
+              <a:defRPr sz="1650" b="1">
                 <a:solidFill>
                   <a:srgbClr val="C2413A"/>
                 </a:solidFill>
@@ -34924,7 +34920,7 @@
               </a:defRPr>
             </a:pPr>
             <a:r>
-              <a:rPr b="1" sz="1650">
+              <a:rPr sz="1650" b="1">
                 <a:solidFill>
                   <a:srgbClr val="C2413A"/>
                 </a:solidFill>
@@ -34966,14 +34962,14 @@
           </a:ln>
         </p:spPr>
         <p:txBody>
-          <a:bodyPr anchor="t" bIns="0" lIns="0" rIns="0" tIns="0" wrap="square">
+          <a:bodyPr wrap="square" lIns="0" tIns="0" rIns="0" bIns="0" anchor="t">
             <a:normAutofit/>
           </a:bodyPr>
           <a:lstStyle/>
           <a:p>
             <a:pPr algn="l">
               <a:buNone/>
-              <a:defRPr b="0" sz="750">
+              <a:defRPr sz="750" b="0">
                 <a:solidFill>
                   <a:srgbClr val="667085"/>
                 </a:solidFill>
@@ -34983,7 +34979,7 @@
               </a:defRPr>
             </a:pPr>
             <a:r>
-              <a:rPr b="0" sz="750">
+              <a:rPr sz="750" b="0">
                 <a:solidFill>
                   <a:srgbClr val="667085"/>
                 </a:solidFill>
@@ -35025,7 +35021,7 @@
           <a:lstStyle/>
           <a:p>
             <a:r>
-              <a:rPr altLang="en-US" b="1" dirty="0" lang="zh-TW" sz="3000">
+              <a:rPr lang="zh-TW" altLang="en-US" sz="3000" b="1" dirty="0">
                 <a:solidFill>
                   <a:srgbClr val="111827"/>
                 </a:solidFill>
@@ -35035,7 +35031,7 @@
               </a:rPr>
               <a:t>Phase 0 → S0 Pilot → S1 A/S → S2 A/A (RO)</a:t>
             </a:r>
-            <a:endParaRPr altLang="en-US" dirty="0" lang="zh-TW"/>
+            <a:endParaRPr lang="zh-TW" altLang="en-US" dirty="0"/>
           </a:p>
         </p:txBody>
       </p:sp>
